--- a/backend/assets/b2b_product_status_template.pptx
+++ b/backend/assets/b2b_product_status_template.pptx
@@ -7422,72 +7422,6 @@
           <a:chExt cx="0" cy="0"/>
         </a:xfrm>
       </p:grpSpPr>
-      <p:graphicFrame>
-        <p:nvGraphicFramePr>
-          <p:cNvPr id="4" name="think-cell data - do not delete" hidden="1">
-            <a:extLst>
-              <a:ext uri="{FF2B5EF4-FFF2-40B4-BE49-F238E27FC236}">
-                <a16:creationId xmlns:a16="http://schemas.microsoft.com/office/drawing/2014/main" id="{F448E571-BE5F-4DE7-3EC6-2B6FEB66F461}"/>
-              </a:ext>
-            </a:extLst>
-          </p:cNvPr>
-          <p:cNvGraphicFramePr>
-            <a:graphicFrameLocks/>
-          </p:cNvGraphicFramePr>
-          <p:nvPr>
-            <p:custDataLst>
-              <p:tags r:id="rId1"/>
-            </p:custDataLst>
-            <p:extLst>
-              <p:ext uri="{D42A27DB-BD31-4B8C-83A1-F6EECF244321}">
-                <p14:modId xmlns:p14="http://schemas.microsoft.com/office/powerpoint/2010/main" val="3316689019"/>
-              </p:ext>
-            </p:extLst>
-          </p:nvPr>
-        </p:nvGraphicFramePr>
-        <p:xfrm>
-          <a:off x="1588" y="1588"/>
-          <a:ext cx="1227" cy="1588"/>
-        </p:xfrm>
-        <a:graphic>
-          <a:graphicData uri="http://schemas.openxmlformats.org/presentationml/2006/ole">
-            <mc:AlternateContent xmlns:mc="http://schemas.openxmlformats.org/markup-compatibility/2006">
-              <mc:Choice xmlns:v="urn:schemas-microsoft-com:vml" Requires="v">
-                <p:oleObj name="Слайд think-cell" r:id="rId4" imgW="7772400" imgH="10058400" progId="TCLayout.ActiveDocument.1">
-                  <p:embed/>
-                </p:oleObj>
-              </mc:Choice>
-              <mc:Fallback>
-                <p:oleObj name="Слайд think-cell" r:id="rId4" imgW="7772400" imgH="10058400" progId="TCLayout.ActiveDocument.1">
-                  <p:embed/>
-                  <p:pic>
-                    <p:nvPicPr>
-                      <p:cNvPr id="0" name=""/>
-                      <p:cNvPicPr/>
-                      <p:nvPr/>
-                    </p:nvPicPr>
-                    <p:blipFill>
-                      <a:blip r:embed="rId5"/>
-                      <a:stretch>
-                        <a:fillRect/>
-                      </a:stretch>
-                    </p:blipFill>
-                    <p:spPr>
-                      <a:xfrm>
-                        <a:off x="1588" y="1588"/>
-                        <a:ext cx="1227" cy="1588"/>
-                      </a:xfrm>
-                      <a:prstGeom prst="rect">
-                        <a:avLst/>
-                      </a:prstGeom>
-                    </p:spPr>
-                  </p:pic>
-                </p:oleObj>
-              </mc:Fallback>
-            </mc:AlternateContent>
-          </a:graphicData>
-        </a:graphic>
-      </p:graphicFrame>
       <p:sp>
         <p:nvSpPr>
           <p:cNvPr id="2" name="Заголовок 1">
@@ -7521,1415 +7455,6 @@
                 <a:latin typeface="T2 Halvar Breit ExtraBold" pitchFamily="2" charset="0"/>
               </a:rPr>
               <a:t>Новости рынка</a:t>
-            </a:r>
-          </a:p>
-        </p:txBody>
-      </p:sp>
-      <p:graphicFrame>
-        <p:nvGraphicFramePr>
-          <p:cNvPr id="3" name="Таблица 2">
-            <a:extLst>
-              <a:ext uri="{FF2B5EF4-FFF2-40B4-BE49-F238E27FC236}">
-                <a16:creationId xmlns:a16="http://schemas.microsoft.com/office/drawing/2014/main" id="{BC9CE81B-D9FA-D2E9-F9A5-3EDD98A80A5A}"/>
-              </a:ext>
-            </a:extLst>
-          </p:cNvPr>
-          <p:cNvGraphicFramePr>
-            <a:graphicFrameLocks noGrp="1"/>
-          </p:cNvGraphicFramePr>
-          <p:nvPr>
-            <p:extLst>
-              <p:ext uri="{D42A27DB-BD31-4B8C-83A1-F6EECF244321}">
-                <p14:modId xmlns:p14="http://schemas.microsoft.com/office/powerpoint/2010/main" val="1616823206"/>
-              </p:ext>
-            </p:extLst>
-          </p:nvPr>
-        </p:nvGraphicFramePr>
-        <p:xfrm>
-          <a:off x="426720" y="982980"/>
-          <a:ext cx="11031070" cy="741680"/>
-        </p:xfrm>
-        <a:graphic>
-          <a:graphicData uri="http://schemas.openxmlformats.org/drawingml/2006/table">
-            <a:tbl>
-              <a:tblPr bandRow="1">
-                <a:tableStyleId>{5C22544A-7EE6-4342-B048-85BDC9FD1C3A}</a:tableStyleId>
-              </a:tblPr>
-              <a:tblGrid>
-                <a:gridCol w="697784">
-                  <a:extLst>
-                    <a:ext uri="{9D8B030D-6E8A-4147-A177-3AD203B41FA5}">
-                      <a16:colId xmlns:a16="http://schemas.microsoft.com/office/drawing/2014/main" val="643601428"/>
-                    </a:ext>
-                  </a:extLst>
-                </a:gridCol>
-                <a:gridCol w="1308846">
-                  <a:extLst>
-                    <a:ext uri="{9D8B030D-6E8A-4147-A177-3AD203B41FA5}">
-                      <a16:colId xmlns:a16="http://schemas.microsoft.com/office/drawing/2014/main" val="353378822"/>
-                    </a:ext>
-                  </a:extLst>
-                </a:gridCol>
-                <a:gridCol w="5395656">
-                  <a:extLst>
-                    <a:ext uri="{9D8B030D-6E8A-4147-A177-3AD203B41FA5}">
-                      <a16:colId xmlns:a16="http://schemas.microsoft.com/office/drawing/2014/main" val="3723860963"/>
-                    </a:ext>
-                  </a:extLst>
-                </a:gridCol>
-                <a:gridCol w="3628784">
-                  <a:extLst>
-                    <a:ext uri="{9D8B030D-6E8A-4147-A177-3AD203B41FA5}">
-                      <a16:colId xmlns:a16="http://schemas.microsoft.com/office/drawing/2014/main" val="3911611580"/>
-                    </a:ext>
-                  </a:extLst>
-                </a:gridCol>
-              </a:tblGrid>
-              <a:tr h="370840">
-                <a:tc>
-                  <a:txBody>
-                    <a:bodyPr/>
-                    <a:lstStyle/>
-                    <a:p>
-                      <a:r>
-                        <a:rPr lang="ru-RU" sz="1000" b="1" dirty="0">
-                          <a:latin typeface="T2 Rooftop" pitchFamily="2" charset="0"/>
-                        </a:rPr>
-                        <a:t>Дата</a:t>
-                      </a:r>
-                    </a:p>
-                  </a:txBody>
-                  <a:tcPr>
-                    <a:noFill/>
-                  </a:tcPr>
-                </a:tc>
-                <a:tc>
-                  <a:txBody>
-                    <a:bodyPr/>
-                    <a:lstStyle/>
-                    <a:p>
-                      <a:r>
-                        <a:rPr lang="ru-RU" sz="1000" b="1" dirty="0">
-                          <a:latin typeface="T2 Rooftop" pitchFamily="2" charset="0"/>
-                        </a:rPr>
-                        <a:t>Стрим</a:t>
-                      </a:r>
-                    </a:p>
-                  </a:txBody>
-                  <a:tcPr>
-                    <a:noFill/>
-                  </a:tcPr>
-                </a:tc>
-                <a:tc>
-                  <a:txBody>
-                    <a:bodyPr/>
-                    <a:lstStyle/>
-                    <a:p>
-                      <a:r>
-                        <a:rPr lang="ru-RU" sz="1000" b="1" dirty="0">
-                          <a:latin typeface="T2 Rooftop" pitchFamily="2" charset="0"/>
-                        </a:rPr>
-                        <a:t>Описание</a:t>
-                      </a:r>
-                    </a:p>
-                  </a:txBody>
-                  <a:tcPr>
-                    <a:noFill/>
-                  </a:tcPr>
-                </a:tc>
-                <a:tc>
-                  <a:txBody>
-                    <a:bodyPr/>
-                    <a:lstStyle/>
-                    <a:p>
-                      <a:endParaRPr lang="ru-RU" sz="1000" b="1" dirty="0"/>
-                    </a:p>
-                  </a:txBody>
-                  <a:tcPr>
-                    <a:noFill/>
-                  </a:tcPr>
-                </a:tc>
-                <a:extLst>
-                  <a:ext uri="{0D108BD9-81ED-4DB2-BD59-A6C34878D82A}">
-                    <a16:rowId xmlns:a16="http://schemas.microsoft.com/office/drawing/2014/main" val="57347346"/>
-                  </a:ext>
-                </a:extLst>
-              </a:tr>
-              <a:tr h="370840">
-                <a:tc>
-                  <a:txBody>
-                    <a:bodyPr/>
-                    <a:lstStyle/>
-                    <a:p>
-                      <a:endParaRPr lang="ru-RU" sz="1000" dirty="0">
-                        <a:latin typeface="T2 Rooftop" pitchFamily="2" charset="0"/>
-                      </a:endParaRPr>
-                    </a:p>
-                  </a:txBody>
-                  <a:tcPr/>
-                </a:tc>
-                <a:tc>
-                  <a:txBody>
-                    <a:bodyPr/>
-                    <a:lstStyle/>
-                    <a:p>
-                      <a:endParaRPr lang="ru-RU" sz="1000" dirty="0">
-                        <a:latin typeface="T2 Rooftop" pitchFamily="2" charset="0"/>
-                      </a:endParaRPr>
-                    </a:p>
-                  </a:txBody>
-                  <a:tcPr/>
-                </a:tc>
-                <a:tc>
-                  <a:txBody>
-                    <a:bodyPr/>
-                    <a:lstStyle/>
-                    <a:p>
-                      <a:endParaRPr lang="ru-RU" sz="1000" dirty="0">
-                        <a:latin typeface="T2 Rooftop" pitchFamily="2" charset="0"/>
-                      </a:endParaRPr>
-                    </a:p>
-                  </a:txBody>
-                  <a:tcPr/>
-                </a:tc>
-                <a:tc>
-                  <a:txBody>
-                    <a:bodyPr/>
-                    <a:lstStyle/>
-                    <a:p>
-                      <a:endParaRPr lang="ru-RU" sz="800" b="0" i="0" dirty="0">
-                        <a:latin typeface="T2 Rooftop" pitchFamily="2" charset="0"/>
-                      </a:endParaRPr>
-                    </a:p>
-                  </a:txBody>
-                  <a:tcPr/>
-                </a:tc>
-                <a:extLst>
-                  <a:ext uri="{0D108BD9-81ED-4DB2-BD59-A6C34878D82A}">
-                    <a16:rowId xmlns:a16="http://schemas.microsoft.com/office/drawing/2014/main" val="3165090101"/>
-                  </a:ext>
-                </a:extLst>
-              </a:tr>
-            </a:tbl>
-          </a:graphicData>
-        </a:graphic>
-      </p:graphicFrame>
-      <p:graphicFrame>
-        <p:nvGraphicFramePr>
-          <p:cNvPr id="5" name="Таблица 4">
-            <a:extLst>
-              <a:ext uri="{FF2B5EF4-FFF2-40B4-BE49-F238E27FC236}">
-                <a16:creationId xmlns:a16="http://schemas.microsoft.com/office/drawing/2014/main" id="{2268B8F5-CAA0-5062-A78B-43D1D9AE608C}"/>
-              </a:ext>
-            </a:extLst>
-          </p:cNvPr>
-          <p:cNvGraphicFramePr>
-            <a:graphicFrameLocks noGrp="1"/>
-          </p:cNvGraphicFramePr>
-          <p:nvPr>
-            <p:extLst>
-              <p:ext uri="{D42A27DB-BD31-4B8C-83A1-F6EECF244321}">
-                <p14:modId xmlns:p14="http://schemas.microsoft.com/office/powerpoint/2010/main" val="560868148"/>
-              </p:ext>
-            </p:extLst>
-          </p:nvPr>
-        </p:nvGraphicFramePr>
-        <p:xfrm>
-          <a:off x="580464" y="2505040"/>
-          <a:ext cx="11031071" cy="4130040"/>
-        </p:xfrm>
-        <a:graphic>
-          <a:graphicData uri="http://schemas.openxmlformats.org/drawingml/2006/table">
-            <a:tbl>
-              <a:tblPr bandRow="1">
-                <a:tableStyleId>{5C22544A-7EE6-4342-B048-85BDC9FD1C3A}</a:tableStyleId>
-              </a:tblPr>
-              <a:tblGrid>
-                <a:gridCol w="936812">
-                  <a:extLst>
-                    <a:ext uri="{9D8B030D-6E8A-4147-A177-3AD203B41FA5}">
-                      <a16:colId xmlns:a16="http://schemas.microsoft.com/office/drawing/2014/main" val="643601428"/>
-                    </a:ext>
-                  </a:extLst>
-                </a:gridCol>
-                <a:gridCol w="824753">
-                  <a:extLst>
-                    <a:ext uri="{9D8B030D-6E8A-4147-A177-3AD203B41FA5}">
-                      <a16:colId xmlns:a16="http://schemas.microsoft.com/office/drawing/2014/main" val="353378822"/>
-                    </a:ext>
-                  </a:extLst>
-                </a:gridCol>
-                <a:gridCol w="5540189">
-                  <a:extLst>
-                    <a:ext uri="{9D8B030D-6E8A-4147-A177-3AD203B41FA5}">
-                      <a16:colId xmlns:a16="http://schemas.microsoft.com/office/drawing/2014/main" val="3723860963"/>
-                    </a:ext>
-                  </a:extLst>
-                </a:gridCol>
-                <a:gridCol w="3729317">
-                  <a:extLst>
-                    <a:ext uri="{9D8B030D-6E8A-4147-A177-3AD203B41FA5}">
-                      <a16:colId xmlns:a16="http://schemas.microsoft.com/office/drawing/2014/main" val="1180705005"/>
-                    </a:ext>
-                  </a:extLst>
-                </a:gridCol>
-              </a:tblGrid>
-              <a:tr h="370840">
-                <a:tc>
-                  <a:txBody>
-                    <a:bodyPr/>
-                    <a:lstStyle/>
-                    <a:p>
-                      <a:pPr marL="0" marR="0" indent="0" algn="l" defTabSz="914400" rtl="0" eaLnBrk="1" fontAlgn="auto" latinLnBrk="0" hangingPunct="1">
-                        <a:lnSpc>
-                          <a:spcPct val="100000"/>
-                        </a:lnSpc>
-                        <a:spcBef>
-                          <a:spcPts val="0"/>
-                        </a:spcBef>
-                        <a:spcAft>
-                          <a:spcPts val="0"/>
-                        </a:spcAft>
-                        <a:buClrTx/>
-                        <a:buSzTx/>
-                        <a:buFontTx/>
-                        <a:buNone/>
-                        <a:tabLst/>
-                        <a:defRPr/>
-                      </a:pPr>
-                      <a:r>
-                        <a:rPr lang="ru-RU" sz="1000" dirty="0">
-                          <a:latin typeface="T2 Rooftop" pitchFamily="2" charset="0"/>
-                        </a:rPr>
-                        <a:t>25.05</a:t>
-                      </a:r>
-                    </a:p>
-                  </a:txBody>
-                  <a:tcPr/>
-                </a:tc>
-                <a:tc>
-                  <a:txBody>
-                    <a:bodyPr/>
-                    <a:lstStyle/>
-                    <a:p>
-                      <a:pPr rtl="0"/>
-                      <a:r>
-                        <a:rPr lang="ru-RU" sz="1000" dirty="0">
-                          <a:latin typeface="T2 Rooftop" pitchFamily="2" charset="0"/>
-                        </a:rPr>
-                        <a:t>Umnico</a:t>
-                      </a:r>
-                    </a:p>
-                  </a:txBody>
-                  <a:tcPr/>
-                </a:tc>
-                <a:tc>
-                  <a:txBody>
-                    <a:bodyPr/>
-                    <a:lstStyle/>
-                    <a:p>
-                      <a:pPr marL="0" marR="0" indent="0" algn="l" defTabSz="914400" rtl="0" eaLnBrk="1" fontAlgn="auto" latinLnBrk="0" hangingPunct="1">
-                        <a:lnSpc>
-                          <a:spcPct val="100000"/>
-                        </a:lnSpc>
-                        <a:spcBef>
-                          <a:spcPts val="0"/>
-                        </a:spcBef>
-                        <a:spcAft>
-                          <a:spcPts val="0"/>
-                        </a:spcAft>
-                        <a:buClrTx/>
-                        <a:buSzTx/>
-                        <a:buFontTx/>
-                        <a:buNone/>
-                        <a:tabLst/>
-                        <a:defRPr/>
-                      </a:pPr>
-                      <a:r>
-                        <a:rPr lang="ru-RU" sz="1000" dirty="0">
-                          <a:latin typeface="T2 Rooftop" pitchFamily="2" charset="0"/>
-                        </a:rPr>
-                        <a:t>Проведено федеральное обучение SM по продукту и продажам</a:t>
-                      </a:r>
-                    </a:p>
-                  </a:txBody>
-                  <a:tcPr/>
-                </a:tc>
-                <a:tc>
-                  <a:txBody>
-                    <a:bodyPr/>
-                    <a:lstStyle/>
-                    <a:p>
-                      <a:pPr marL="0" marR="0" indent="0" algn="l" defTabSz="914400" rtl="0" eaLnBrk="1" fontAlgn="auto" latinLnBrk="0" hangingPunct="1">
-                        <a:lnSpc>
-                          <a:spcPct val="100000"/>
-                        </a:lnSpc>
-                        <a:spcBef>
-                          <a:spcPts val="0"/>
-                        </a:spcBef>
-                        <a:spcAft>
-                          <a:spcPts val="0"/>
-                        </a:spcAft>
-                        <a:buClrTx/>
-                        <a:buSzTx/>
-                        <a:buFontTx/>
-                        <a:buNone/>
-                        <a:tabLst/>
-                        <a:defRPr/>
-                      </a:pPr>
-                      <a:r>
-                        <a:rPr lang="ru-RU" sz="800" dirty="0">
-                          <a:latin typeface="T2 Rooftop" pitchFamily="2" charset="0"/>
-                        </a:rPr>
-                        <a:t>Проведение обучения на регулярной основе</a:t>
-                      </a:r>
-                    </a:p>
-                  </a:txBody>
-                  <a:tcPr/>
-                </a:tc>
-                <a:extLst>
-                  <a:ext uri="{0D108BD9-81ED-4DB2-BD59-A6C34878D82A}">
-                    <a16:rowId xmlns:a16="http://schemas.microsoft.com/office/drawing/2014/main" val="740064455"/>
-                  </a:ext>
-                </a:extLst>
-              </a:tr>
-              <a:tr h="370840">
-                <a:tc>
-                  <a:txBody>
-                    <a:bodyPr/>
-                    <a:lstStyle/>
-                    <a:p>
-                      <a:pPr marL="0" marR="0" indent="0" algn="l" defTabSz="914400" rtl="0" eaLnBrk="1" fontAlgn="auto" latinLnBrk="0" hangingPunct="1">
-                        <a:lnSpc>
-                          <a:spcPct val="100000"/>
-                        </a:lnSpc>
-                        <a:spcBef>
-                          <a:spcPts val="0"/>
-                        </a:spcBef>
-                        <a:spcAft>
-                          <a:spcPts val="0"/>
-                        </a:spcAft>
-                        <a:buClrTx/>
-                        <a:buSzTx/>
-                        <a:buFontTx/>
-                        <a:buNone/>
-                        <a:tabLst/>
-                        <a:defRPr/>
-                      </a:pPr>
-                      <a:r>
-                        <a:rPr lang="ru-RU" sz="1000" dirty="0">
-                          <a:latin typeface="T2 Rooftop" pitchFamily="2" charset="0"/>
-                        </a:rPr>
-                        <a:t>27.05</a:t>
-                      </a:r>
-                    </a:p>
-                  </a:txBody>
-                  <a:tcPr/>
-                </a:tc>
-                <a:tc>
-                  <a:txBody>
-                    <a:bodyPr/>
-                    <a:lstStyle/>
-                    <a:p>
-                      <a:pPr rtl="0"/>
-                      <a:r>
-                        <a:rPr lang="ru-RU" sz="1000">
-                          <a:latin typeface="T2 Rooftop" pitchFamily="2" charset="0"/>
-                        </a:rPr>
-                        <a:t>CORE</a:t>
-                      </a:r>
-                      <a:endParaRPr lang="ru-RU" sz="1000" dirty="0">
-                        <a:latin typeface="T2 Rooftop" pitchFamily="2" charset="0"/>
-                      </a:endParaRPr>
-                    </a:p>
-                  </a:txBody>
-                  <a:tcPr/>
-                </a:tc>
-                <a:tc>
-                  <a:txBody>
-                    <a:bodyPr/>
-                    <a:lstStyle/>
-                    <a:p>
-                      <a:pPr marL="0" marR="0" indent="0" algn="l" defTabSz="914400" rtl="0" eaLnBrk="1" fontAlgn="auto" latinLnBrk="0" hangingPunct="1">
-                        <a:lnSpc>
-                          <a:spcPct val="100000"/>
-                        </a:lnSpc>
-                        <a:spcBef>
-                          <a:spcPts val="0"/>
-                        </a:spcBef>
-                        <a:spcAft>
-                          <a:spcPts val="0"/>
-                        </a:spcAft>
-                        <a:buClrTx/>
-                        <a:buSzTx/>
-                        <a:buFontTx/>
-                        <a:buNone/>
-                        <a:tabLst/>
-                        <a:defRPr/>
-                      </a:pPr>
-                      <a:r>
-                        <a:rPr lang="ru-RU" sz="1000" dirty="0">
-                          <a:latin typeface="T2 Rooftop" pitchFamily="2" charset="0"/>
-                        </a:rPr>
-                        <a:t>Перезапуск линейки «Федеральный» (технический)</a:t>
-                      </a:r>
-                    </a:p>
-                  </a:txBody>
-                  <a:tcPr/>
-                </a:tc>
-                <a:tc>
-                  <a:txBody>
-                    <a:bodyPr/>
-                    <a:lstStyle/>
-                    <a:p>
-                      <a:pPr rtl="0"/>
-                      <a:r>
-                        <a:rPr lang="ru-RU" sz="800" dirty="0">
-                          <a:latin typeface="T2 Rooftop" pitchFamily="2" charset="0"/>
-                        </a:rPr>
-                        <a:t>Технический перезапуск для будущих офсетов. Без изменений параметров</a:t>
-                      </a:r>
-                    </a:p>
-                  </a:txBody>
-                  <a:tcPr/>
-                </a:tc>
-                <a:extLst>
-                  <a:ext uri="{0D108BD9-81ED-4DB2-BD59-A6C34878D82A}">
-                    <a16:rowId xmlns:a16="http://schemas.microsoft.com/office/drawing/2014/main" val="2418814631"/>
-                  </a:ext>
-                </a:extLst>
-              </a:tr>
-              <a:tr h="370840">
-                <a:tc>
-                  <a:txBody>
-                    <a:bodyPr/>
-                    <a:lstStyle/>
-                    <a:p>
-                      <a:pPr marL="0" marR="0" indent="0" algn="l" defTabSz="914400" rtl="0" eaLnBrk="1" fontAlgn="auto" latinLnBrk="0" hangingPunct="1">
-                        <a:lnSpc>
-                          <a:spcPct val="100000"/>
-                        </a:lnSpc>
-                        <a:spcBef>
-                          <a:spcPts val="0"/>
-                        </a:spcBef>
-                        <a:spcAft>
-                          <a:spcPts val="0"/>
-                        </a:spcAft>
-                        <a:buClrTx/>
-                        <a:buSzTx/>
-                        <a:buFontTx/>
-                        <a:buNone/>
-                        <a:tabLst/>
-                        <a:defRPr/>
-                      </a:pPr>
-                      <a:r>
-                        <a:rPr lang="en-US" sz="1000" dirty="0">
-                          <a:latin typeface="T2 Rooftop" pitchFamily="2" charset="0"/>
-                        </a:rPr>
-                        <a:t>28.05</a:t>
-                      </a:r>
-                      <a:endParaRPr lang="ru-RU" sz="1000" dirty="0">
-                        <a:latin typeface="T2 Rooftop" pitchFamily="2" charset="0"/>
-                      </a:endParaRPr>
-                    </a:p>
-                  </a:txBody>
-                  <a:tcPr/>
-                </a:tc>
-                <a:tc>
-                  <a:txBody>
-                    <a:bodyPr/>
-                    <a:lstStyle/>
-                    <a:p>
-                      <a:pPr rtl="0"/>
-                      <a:r>
-                        <a:rPr lang="en-US" sz="1000" dirty="0">
-                          <a:latin typeface="T2 Rooftop" pitchFamily="2" charset="0"/>
-                        </a:rPr>
-                        <a:t>SMS Hub</a:t>
-                      </a:r>
-                      <a:endParaRPr lang="ru-RU" sz="1000" dirty="0">
-                        <a:latin typeface="T2 Rooftop" pitchFamily="2" charset="0"/>
-                      </a:endParaRPr>
-                    </a:p>
-                  </a:txBody>
-                  <a:tcPr/>
-                </a:tc>
-                <a:tc>
-                  <a:txBody>
-                    <a:bodyPr/>
-                    <a:lstStyle/>
-                    <a:p>
-                      <a:pPr marL="0" marR="0" indent="0" algn="l" defTabSz="914400" rtl="0" eaLnBrk="1" fontAlgn="auto" latinLnBrk="0" hangingPunct="1">
-                        <a:lnSpc>
-                          <a:spcPct val="100000"/>
-                        </a:lnSpc>
-                        <a:spcBef>
-                          <a:spcPts val="0"/>
-                        </a:spcBef>
-                        <a:spcAft>
-                          <a:spcPts val="0"/>
-                        </a:spcAft>
-                        <a:buClrTx/>
-                        <a:buSzTx/>
-                        <a:buFontTx/>
-                        <a:buNone/>
-                        <a:tabLst/>
-                        <a:defRPr/>
-                      </a:pPr>
-                      <a:r>
-                        <a:rPr lang="ru-RU" sz="1000" dirty="0">
-                          <a:latin typeface="T2 Rooftop" pitchFamily="2" charset="0"/>
-                        </a:rPr>
-                        <a:t>Запуск новых отчетов по тарификации из </a:t>
-                      </a:r>
-                      <a:r>
-                        <a:rPr lang="en-US" sz="1000" dirty="0">
-                          <a:latin typeface="T2 Rooftop" pitchFamily="2" charset="0"/>
-                        </a:rPr>
-                        <a:t>ЛК</a:t>
-                      </a:r>
-                      <a:r>
-                        <a:rPr lang="ru-RU" sz="1000" dirty="0">
-                          <a:latin typeface="T2 Rooftop" pitchFamily="2" charset="0"/>
-                        </a:rPr>
-                        <a:t> пользователя услугой. Проставлена стоимость по каждому унику в соответствии с кол-вом отправленных </a:t>
-                      </a:r>
-                      <a:r>
-                        <a:rPr lang="en-US" sz="1000" dirty="0">
-                          <a:latin typeface="T2 Rooftop" pitchFamily="2" charset="0"/>
-                        </a:rPr>
-                        <a:t>SMS</a:t>
-                      </a:r>
-                      <a:endParaRPr lang="ru-RU" sz="1000" dirty="0">
-                        <a:latin typeface="T2 Rooftop" pitchFamily="2" charset="0"/>
-                      </a:endParaRPr>
-                    </a:p>
-                  </a:txBody>
-                  <a:tcPr/>
-                </a:tc>
-                <a:tc>
-                  <a:txBody>
-                    <a:bodyPr/>
-                    <a:lstStyle/>
-                    <a:p>
-                      <a:pPr rtl="0"/>
-                      <a:endParaRPr lang="ru-RU" sz="800" dirty="0">
-                        <a:latin typeface="T2 Rooftop" pitchFamily="2" charset="0"/>
-                      </a:endParaRPr>
-                    </a:p>
-                  </a:txBody>
-                  <a:tcPr/>
-                </a:tc>
-                <a:extLst>
-                  <a:ext uri="{0D108BD9-81ED-4DB2-BD59-A6C34878D82A}">
-                    <a16:rowId xmlns:a16="http://schemas.microsoft.com/office/drawing/2014/main" val="2835655475"/>
-                  </a:ext>
-                </a:extLst>
-              </a:tr>
-              <a:tr h="370840">
-                <a:tc>
-                  <a:txBody>
-                    <a:bodyPr/>
-                    <a:lstStyle/>
-                    <a:p>
-                      <a:pPr rtl="0"/>
-                      <a:r>
-                        <a:rPr lang="ru-RU" sz="1000" dirty="0">
-                          <a:latin typeface="T2 Rooftop" pitchFamily="2" charset="0"/>
-                        </a:rPr>
-                        <a:t>01.06</a:t>
-                      </a:r>
-                    </a:p>
-                  </a:txBody>
-                  <a:tcPr/>
-                </a:tc>
-                <a:tc>
-                  <a:txBody>
-                    <a:bodyPr/>
-                    <a:lstStyle/>
-                    <a:p>
-                      <a:pPr rtl="0"/>
-                      <a:r>
-                        <a:rPr lang="ru-RU" sz="1000">
-                          <a:latin typeface="T2 Rooftop" pitchFamily="2" charset="0"/>
-                        </a:rPr>
-                        <a:t>SMS</a:t>
-                      </a:r>
-                      <a:endParaRPr lang="ru-RU" sz="1000" dirty="0">
-                        <a:latin typeface="T2 Rooftop" pitchFamily="2" charset="0"/>
-                      </a:endParaRPr>
-                    </a:p>
-                  </a:txBody>
-                  <a:tcPr/>
-                </a:tc>
-                <a:tc>
-                  <a:txBody>
-                    <a:bodyPr/>
-                    <a:lstStyle/>
-                    <a:p>
-                      <a:pPr marL="0" marR="0" lvl="0" indent="0" algn="l" defTabSz="914400" rtl="0" eaLnBrk="1" fontAlgn="auto" latinLnBrk="0" hangingPunct="1">
-                        <a:lnSpc>
-                          <a:spcPct val="100000"/>
-                        </a:lnSpc>
-                        <a:spcBef>
-                          <a:spcPts val="0"/>
-                        </a:spcBef>
-                        <a:spcAft>
-                          <a:spcPts val="0"/>
-                        </a:spcAft>
-                        <a:buClrTx/>
-                        <a:buSzTx/>
-                        <a:buFontTx/>
-                        <a:buNone/>
-                        <a:tabLst/>
-                        <a:defRPr/>
-                      </a:pPr>
-                      <a:r>
-                        <a:rPr lang="ru-RU" sz="1000" dirty="0">
-                          <a:effectLst/>
-                          <a:latin typeface="T2 Rooftop" pitchFamily="2" charset="0"/>
-                        </a:rPr>
-                        <a:t>Изменение АП по согласованным именам отправителей на Т2, МТС, Билайн, К-Телеком и КТК-Телеком</a:t>
-                      </a:r>
-                    </a:p>
-                  </a:txBody>
-                  <a:tcPr/>
-                </a:tc>
-                <a:tc>
-                  <a:txBody>
-                    <a:bodyPr/>
-                    <a:lstStyle/>
-                    <a:p>
-                      <a:pPr rtl="0"/>
-                      <a:endParaRPr lang="ru-RU" sz="800" dirty="0">
-                        <a:latin typeface="T2 Rooftop" pitchFamily="2" charset="0"/>
-                      </a:endParaRPr>
-                    </a:p>
-                  </a:txBody>
-                  <a:tcPr/>
-                </a:tc>
-                <a:extLst>
-                  <a:ext uri="{0D108BD9-81ED-4DB2-BD59-A6C34878D82A}">
-                    <a16:rowId xmlns:a16="http://schemas.microsoft.com/office/drawing/2014/main" val="1351685083"/>
-                  </a:ext>
-                </a:extLst>
-              </a:tr>
-              <a:tr h="370840">
-                <a:tc>
-                  <a:txBody>
-                    <a:bodyPr/>
-                    <a:lstStyle/>
-                    <a:p>
-                      <a:pPr rtl="0"/>
-                      <a:r>
-                        <a:rPr lang="ru-RU" sz="1000" dirty="0">
-                          <a:latin typeface="T2 Rooftop" pitchFamily="2" charset="0"/>
-                        </a:rPr>
-                        <a:t>02.06</a:t>
-                      </a:r>
-                    </a:p>
-                  </a:txBody>
-                  <a:tcPr/>
-                </a:tc>
-                <a:tc>
-                  <a:txBody>
-                    <a:bodyPr/>
-                    <a:lstStyle/>
-                    <a:p>
-                      <a:pPr rtl="0"/>
-                      <a:r>
-                        <a:rPr lang="en-US" sz="1000" dirty="0">
-                          <a:latin typeface="T2 Rooftop" pitchFamily="2" charset="0"/>
-                        </a:rPr>
-                        <a:t>SMS</a:t>
-                      </a:r>
-                      <a:endParaRPr lang="ru-RU" sz="1000" dirty="0">
-                        <a:latin typeface="T2 Rooftop" pitchFamily="2" charset="0"/>
-                      </a:endParaRPr>
-                    </a:p>
-                  </a:txBody>
-                  <a:tcPr/>
-                </a:tc>
-                <a:tc>
-                  <a:txBody>
-                    <a:bodyPr/>
-                    <a:lstStyle/>
-                    <a:p>
-                      <a:pPr marL="0" marR="0" lvl="0" indent="0" algn="l" defTabSz="914400" rtl="0" eaLnBrk="1" fontAlgn="auto" latinLnBrk="0" hangingPunct="1">
-                        <a:lnSpc>
-                          <a:spcPct val="100000"/>
-                        </a:lnSpc>
-                        <a:spcBef>
-                          <a:spcPts val="0"/>
-                        </a:spcBef>
-                        <a:spcAft>
-                          <a:spcPts val="0"/>
-                        </a:spcAft>
-                        <a:buClrTx/>
-                        <a:buSzTx/>
-                        <a:buFontTx/>
-                        <a:buNone/>
-                        <a:tabLst/>
-                        <a:defRPr/>
-                      </a:pPr>
-                      <a:r>
-                        <a:rPr lang="ru-RU" sz="1000" dirty="0">
-                          <a:effectLst/>
-                          <a:latin typeface="T2 Rooftop" pitchFamily="2" charset="0"/>
-                        </a:rPr>
-                        <a:t>Новый релиз:</a:t>
-                      </a:r>
-                    </a:p>
-                    <a:p>
-                      <a:pPr marL="0" marR="0" lvl="0" indent="0" algn="l" defTabSz="914400" rtl="0" eaLnBrk="1" fontAlgn="auto" latinLnBrk="0" hangingPunct="1">
-                        <a:lnSpc>
-                          <a:spcPct val="100000"/>
-                        </a:lnSpc>
-                        <a:spcBef>
-                          <a:spcPts val="0"/>
-                        </a:spcBef>
-                        <a:spcAft>
-                          <a:spcPts val="0"/>
-                        </a:spcAft>
-                        <a:buClrTx/>
-                        <a:buSzTx/>
-                        <a:buFontTx/>
-                        <a:buNone/>
-                        <a:tabLst/>
-                        <a:defRPr/>
-                      </a:pPr>
-                      <a:r>
-                        <a:rPr lang="ru-RU" sz="1000" dirty="0">
-                          <a:effectLst/>
-                          <a:latin typeface="T2 Rooftop" pitchFamily="2" charset="0"/>
-                        </a:rPr>
-                        <a:t>Расширили набор смайликов в личном кабинете (студент, спортсмен, ребенок и др.);</a:t>
-                      </a:r>
-                    </a:p>
-                    <a:p>
-                      <a:pPr marL="0" marR="0" lvl="0" indent="0" algn="l" defTabSz="914400" rtl="0" eaLnBrk="1" fontAlgn="auto" latinLnBrk="0" hangingPunct="1">
-                        <a:lnSpc>
-                          <a:spcPct val="100000"/>
-                        </a:lnSpc>
-                        <a:spcBef>
-                          <a:spcPts val="0"/>
-                        </a:spcBef>
-                        <a:spcAft>
-                          <a:spcPts val="0"/>
-                        </a:spcAft>
-                        <a:buClrTx/>
-                        <a:buSzTx/>
-                        <a:buFontTx/>
-                        <a:buNone/>
-                        <a:tabLst/>
-                        <a:defRPr/>
-                      </a:pPr>
-                      <a:r>
-                        <a:rPr lang="ru-RU" sz="1000" dirty="0">
-                          <a:effectLst/>
-                          <a:latin typeface="T2 Rooftop" pitchFamily="2" charset="0"/>
-                        </a:rPr>
-                        <a:t>Увеличили «срок жизни» аудитории в Яндекс и </a:t>
-                      </a:r>
-                      <a:r>
-                        <a:rPr lang="en-US" sz="1000" dirty="0">
-                          <a:effectLst/>
-                          <a:latin typeface="T2 Rooftop" pitchFamily="2" charset="0"/>
-                        </a:rPr>
-                        <a:t>VK </a:t>
-                      </a:r>
-                      <a:r>
-                        <a:rPr lang="ru-RU" sz="1000" dirty="0">
-                          <a:effectLst/>
-                          <a:latin typeface="T2 Rooftop" pitchFamily="2" charset="0"/>
-                        </a:rPr>
-                        <a:t>до 30 дней;</a:t>
-                      </a:r>
-                    </a:p>
-                    <a:p>
-                      <a:pPr marL="0" marR="0" lvl="0" indent="0" algn="l" defTabSz="914400" rtl="0" eaLnBrk="1" fontAlgn="auto" latinLnBrk="0" hangingPunct="1">
-                        <a:lnSpc>
-                          <a:spcPct val="100000"/>
-                        </a:lnSpc>
-                        <a:spcBef>
-                          <a:spcPts val="0"/>
-                        </a:spcBef>
-                        <a:spcAft>
-                          <a:spcPts val="0"/>
-                        </a:spcAft>
-                        <a:buClrTx/>
-                        <a:buSzTx/>
-                        <a:buFontTx/>
-                        <a:buNone/>
-                        <a:tabLst/>
-                        <a:defRPr/>
-                      </a:pPr>
-                      <a:r>
-                        <a:rPr lang="ru-RU" sz="1000" dirty="0">
-                          <a:effectLst/>
-                          <a:latin typeface="T2 Rooftop" pitchFamily="2" charset="0"/>
-                        </a:rPr>
-                        <a:t>Упростили добавление клиентов в группы;</a:t>
-                      </a:r>
-                    </a:p>
-                    <a:p>
-                      <a:pPr marL="0" marR="0" lvl="0" indent="0" algn="l" defTabSz="914400" rtl="0" eaLnBrk="1" fontAlgn="auto" latinLnBrk="0" hangingPunct="1">
-                        <a:lnSpc>
-                          <a:spcPct val="100000"/>
-                        </a:lnSpc>
-                        <a:spcBef>
-                          <a:spcPts val="0"/>
-                        </a:spcBef>
-                        <a:spcAft>
-                          <a:spcPts val="0"/>
-                        </a:spcAft>
-                        <a:buClrTx/>
-                        <a:buSzTx/>
-                        <a:buFontTx/>
-                        <a:buNone/>
-                        <a:tabLst/>
-                        <a:defRPr/>
-                      </a:pPr>
-                      <a:r>
-                        <a:rPr lang="ru-RU" sz="1000" dirty="0">
-                          <a:effectLst/>
-                          <a:latin typeface="T2 Rooftop" pitchFamily="2" charset="0"/>
-                        </a:rPr>
-                        <a:t>Автоматизировали рекламу для индивидуальных аудиторий;</a:t>
-                      </a:r>
-                    </a:p>
-                    <a:p>
-                      <a:pPr marL="0" marR="0" lvl="0" indent="0" algn="l" defTabSz="914400" rtl="0" eaLnBrk="1" fontAlgn="auto" latinLnBrk="0" hangingPunct="1">
-                        <a:lnSpc>
-                          <a:spcPct val="100000"/>
-                        </a:lnSpc>
-                        <a:spcBef>
-                          <a:spcPts val="0"/>
-                        </a:spcBef>
-                        <a:spcAft>
-                          <a:spcPts val="0"/>
-                        </a:spcAft>
-                        <a:buClrTx/>
-                        <a:buSzTx/>
-                        <a:buFontTx/>
-                        <a:buNone/>
-                        <a:tabLst/>
-                        <a:defRPr/>
-                      </a:pPr>
-                      <a:r>
-                        <a:rPr lang="ru-RU" sz="1000" dirty="0">
-                          <a:effectLst/>
-                          <a:latin typeface="T2 Rooftop" pitchFamily="2" charset="0"/>
-                        </a:rPr>
-                        <a:t>Маскирование номеров для «ЦА в свободной форме»</a:t>
-                      </a:r>
-                    </a:p>
-                  </a:txBody>
-                  <a:tcPr/>
-                </a:tc>
-                <a:tc>
-                  <a:txBody>
-                    <a:bodyPr/>
-                    <a:lstStyle/>
-                    <a:p>
-                      <a:pPr rtl="0"/>
-                      <a:r>
-                        <a:rPr lang="ru-RU" sz="800" dirty="0">
-                          <a:latin typeface="T2 Rooftop" pitchFamily="2" charset="0"/>
-                        </a:rPr>
-                        <a:t>В </a:t>
-                      </a:r>
-                      <a:r>
-                        <a:rPr lang="en-US" sz="800" dirty="0">
-                          <a:latin typeface="T2 Rooftop" pitchFamily="2" charset="0"/>
-                        </a:rPr>
-                        <a:t>SMS-</a:t>
-                      </a:r>
-                      <a:r>
-                        <a:rPr lang="ru-RU" sz="800" dirty="0">
-                          <a:latin typeface="T2 Rooftop" pitchFamily="2" charset="0"/>
-                        </a:rPr>
-                        <a:t>Таргете клиенты могут собрать уникальную аудиторию: абонентов, которые посещали сайты, звонили и получали звонки от определенных номеров и сообщения от выбранных имен отправителей. Эту аудиторию можно перенести в </a:t>
-                      </a:r>
-                      <a:r>
-                        <a:rPr lang="ru-RU" sz="800" dirty="0" err="1">
-                          <a:latin typeface="T2 Rooftop" pitchFamily="2" charset="0"/>
-                        </a:rPr>
-                        <a:t>Яндекс.Директ</a:t>
-                      </a:r>
-                      <a:r>
-                        <a:rPr lang="ru-RU" sz="800" dirty="0">
-                          <a:latin typeface="T2 Rooftop" pitchFamily="2" charset="0"/>
-                        </a:rPr>
-                        <a:t> и </a:t>
-                      </a:r>
-                      <a:r>
-                        <a:rPr lang="en-US" sz="800" dirty="0">
-                          <a:latin typeface="T2 Rooftop" pitchFamily="2" charset="0"/>
-                        </a:rPr>
-                        <a:t>VK </a:t>
-                      </a:r>
-                      <a:r>
-                        <a:rPr lang="ru-RU" sz="800" dirty="0">
-                          <a:latin typeface="T2 Rooftop" pitchFamily="2" charset="0"/>
-                        </a:rPr>
-                        <a:t>Рекламу, чтобы показать предложение абонентам в формате баннеров/видео в </a:t>
-                      </a:r>
-                      <a:r>
-                        <a:rPr lang="ru-RU" sz="800" dirty="0" err="1">
-                          <a:latin typeface="T2 Rooftop" pitchFamily="2" charset="0"/>
-                        </a:rPr>
-                        <a:t>интернете,а</a:t>
-                      </a:r>
-                      <a:r>
-                        <a:rPr lang="ru-RU" sz="800" dirty="0">
-                          <a:latin typeface="T2 Rooftop" pitchFamily="2" charset="0"/>
-                        </a:rPr>
-                        <a:t> с помощью </a:t>
-                      </a:r>
-                      <a:r>
-                        <a:rPr lang="en-US" sz="800" dirty="0">
-                          <a:latin typeface="T2 Rooftop" pitchFamily="2" charset="0"/>
-                        </a:rPr>
-                        <a:t>SMS </a:t>
-                      </a:r>
-                      <a:r>
-                        <a:rPr lang="ru-RU" sz="800" dirty="0">
-                          <a:latin typeface="T2 Rooftop" pitchFamily="2" charset="0"/>
-                        </a:rPr>
-                        <a:t>отправить уникальную догоняющую рекламу</a:t>
-                      </a:r>
-                    </a:p>
-                    <a:p>
-                      <a:pPr marL="0" marR="0" indent="0" algn="l" defTabSz="914400" rtl="0" eaLnBrk="1" fontAlgn="auto" latinLnBrk="0" hangingPunct="1">
-                        <a:lnSpc>
-                          <a:spcPct val="100000"/>
-                        </a:lnSpc>
-                        <a:spcBef>
-                          <a:spcPts val="0"/>
-                        </a:spcBef>
-                        <a:spcAft>
-                          <a:spcPts val="0"/>
-                        </a:spcAft>
-                        <a:buClrTx/>
-                        <a:buSzTx/>
-                        <a:buFontTx/>
-                        <a:buNone/>
-                        <a:tabLst/>
-                        <a:defRPr/>
-                      </a:pPr>
-                      <a:r>
-                        <a:rPr lang="ru-RU" sz="800" dirty="0">
-                          <a:latin typeface="T2 Rooftop" pitchFamily="2" charset="0"/>
-                        </a:rPr>
-                        <a:t>Автозапуск позволит ежедневно или еженедельно отправлять </a:t>
-                      </a:r>
-                      <a:r>
-                        <a:rPr lang="en-US" sz="800" dirty="0">
-                          <a:latin typeface="T2 Rooftop" pitchFamily="2" charset="0"/>
-                        </a:rPr>
-                        <a:t>SMS </a:t>
-                      </a:r>
-                      <a:r>
-                        <a:rPr lang="ru-RU" sz="800" dirty="0">
-                          <a:latin typeface="T2 Rooftop" pitchFamily="2" charset="0"/>
-                        </a:rPr>
-                        <a:t>по новым выгрузкам, без создания новой рассылки.</a:t>
-                      </a:r>
-                    </a:p>
-                    <a:p>
-                      <a:pPr marL="0" marR="0" indent="0" algn="l" defTabSz="914400" rtl="0" eaLnBrk="1" fontAlgn="auto" latinLnBrk="0" hangingPunct="1">
-                        <a:lnSpc>
-                          <a:spcPct val="100000"/>
-                        </a:lnSpc>
-                        <a:spcBef>
-                          <a:spcPts val="0"/>
-                        </a:spcBef>
-                        <a:spcAft>
-                          <a:spcPts val="0"/>
-                        </a:spcAft>
-                        <a:buClrTx/>
-                        <a:buSzTx/>
-                        <a:buFontTx/>
-                        <a:buNone/>
-                        <a:tabLst/>
-                        <a:defRPr/>
-                      </a:pPr>
-                      <a:r>
-                        <a:rPr lang="ru-RU" sz="800" dirty="0">
-                          <a:latin typeface="T2 Rooftop" pitchFamily="2" charset="0"/>
-                        </a:rPr>
-                        <a:t>для рассылок по </a:t>
-                      </a:r>
-                      <a:r>
-                        <a:rPr lang="en-US" sz="800" dirty="0">
-                          <a:latin typeface="T2 Rooftop" pitchFamily="2" charset="0"/>
-                        </a:rPr>
-                        <a:t>API </a:t>
-                      </a:r>
-                      <a:r>
-                        <a:rPr lang="ru-RU" sz="800" dirty="0">
-                          <a:latin typeface="T2 Rooftop" pitchFamily="2" charset="0"/>
-                        </a:rPr>
-                        <a:t>с участием коллег из </a:t>
-                      </a:r>
-                      <a:r>
-                        <a:rPr lang="en-US" sz="800" dirty="0">
-                          <a:latin typeface="T2 Rooftop" pitchFamily="2" charset="0"/>
-                        </a:rPr>
-                        <a:t>BDO </a:t>
-                      </a:r>
-                      <a:r>
-                        <a:rPr lang="ru-RU" sz="800" dirty="0">
-                          <a:latin typeface="T2 Rooftop" pitchFamily="2" charset="0"/>
-                        </a:rPr>
-                        <a:t>все номера маскируются (шифруются) и не видны для пользователя личного кабинета </a:t>
-                      </a:r>
-                      <a:r>
-                        <a:rPr lang="en-US" sz="800" dirty="0">
-                          <a:latin typeface="T2 Rooftop" pitchFamily="2" charset="0"/>
-                        </a:rPr>
-                        <a:t>SMS-</a:t>
-                      </a:r>
-                      <a:r>
-                        <a:rPr lang="ru-RU" sz="800" dirty="0">
-                          <a:latin typeface="T2 Rooftop" pitchFamily="2" charset="0"/>
-                        </a:rPr>
-                        <a:t>Таргет. Привычная статистика по отправленным </a:t>
-                      </a:r>
-                      <a:r>
-                        <a:rPr lang="en-US" sz="800" dirty="0">
-                          <a:latin typeface="T2 Rooftop" pitchFamily="2" charset="0"/>
-                        </a:rPr>
-                        <a:t>SMS </a:t>
-                      </a:r>
-                      <a:r>
-                        <a:rPr lang="ru-RU" sz="800" dirty="0">
-                          <a:latin typeface="T2 Rooftop" pitchFamily="2" charset="0"/>
-                        </a:rPr>
-                        <a:t>в виде 4-х последних цифр номера</a:t>
-                      </a:r>
-                    </a:p>
-                  </a:txBody>
-                  <a:tcPr/>
-                </a:tc>
-                <a:extLst>
-                  <a:ext uri="{0D108BD9-81ED-4DB2-BD59-A6C34878D82A}">
-                    <a16:rowId xmlns:a16="http://schemas.microsoft.com/office/drawing/2014/main" val="962212918"/>
-                  </a:ext>
-                </a:extLst>
-              </a:tr>
-              <a:tr h="370840">
-                <a:tc>
-                  <a:txBody>
-                    <a:bodyPr/>
-                    <a:lstStyle/>
-                    <a:p>
-                      <a:pPr rtl="0"/>
-                      <a:r>
-                        <a:rPr lang="ru-RU" sz="1000" dirty="0">
-                          <a:latin typeface="T2 Rooftop" pitchFamily="2" charset="0"/>
-                        </a:rPr>
-                        <a:t>10.06</a:t>
-                      </a:r>
-                    </a:p>
-                  </a:txBody>
-                  <a:tcPr/>
-                </a:tc>
-                <a:tc>
-                  <a:txBody>
-                    <a:bodyPr/>
-                    <a:lstStyle/>
-                    <a:p>
-                      <a:pPr rtl="0"/>
-                      <a:r>
-                        <a:rPr lang="ru-RU" sz="1000" dirty="0" err="1">
-                          <a:latin typeface="T2 Rooftop" pitchFamily="2" charset="0"/>
-                        </a:rPr>
-                        <a:t>Геоплатформа</a:t>
-                      </a:r>
-                      <a:endParaRPr lang="ru-RU" sz="1000" dirty="0">
-                        <a:latin typeface="T2 Rooftop" pitchFamily="2" charset="0"/>
-                      </a:endParaRPr>
-                    </a:p>
-                  </a:txBody>
-                  <a:tcPr/>
-                </a:tc>
-                <a:tc>
-                  <a:txBody>
-                    <a:bodyPr/>
-                    <a:lstStyle/>
-                    <a:p>
-                      <a:pPr marL="0" marR="0" lvl="0" indent="0" algn="l" defTabSz="914400" rtl="0" eaLnBrk="1" fontAlgn="auto" latinLnBrk="0" hangingPunct="1">
-                        <a:lnSpc>
-                          <a:spcPct val="100000"/>
-                        </a:lnSpc>
-                        <a:spcBef>
-                          <a:spcPts val="0"/>
-                        </a:spcBef>
-                        <a:spcAft>
-                          <a:spcPts val="0"/>
-                        </a:spcAft>
-                        <a:buClrTx/>
-                        <a:buSzTx/>
-                        <a:buFontTx/>
-                        <a:buNone/>
-                        <a:tabLst/>
-                        <a:defRPr/>
-                      </a:pPr>
-                      <a:r>
-                        <a:rPr lang="ru-RU" sz="1000" dirty="0">
-                          <a:effectLst/>
-                          <a:latin typeface="T2 Rooftop" pitchFamily="2" charset="0"/>
-                        </a:rPr>
-                        <a:t>Обучение </a:t>
-                      </a:r>
-                      <a:r>
-                        <a:rPr lang="en-US" sz="1000" dirty="0">
-                          <a:effectLst/>
-                          <a:latin typeface="T2 Rooftop" pitchFamily="2" charset="0"/>
-                        </a:rPr>
-                        <a:t>VAS-</a:t>
-                      </a:r>
-                      <a:r>
-                        <a:rPr lang="ru-RU" sz="1000" dirty="0">
-                          <a:effectLst/>
-                          <a:latin typeface="T2 Rooftop" pitchFamily="2" charset="0"/>
-                        </a:rPr>
-                        <a:t>экспертов по </a:t>
-                      </a:r>
-                      <a:r>
-                        <a:rPr lang="ru-RU" sz="1000" dirty="0" err="1">
-                          <a:effectLst/>
-                          <a:latin typeface="T2 Rooftop" pitchFamily="2" charset="0"/>
-                        </a:rPr>
-                        <a:t>Геоплатформе</a:t>
-                      </a:r>
-                      <a:endParaRPr lang="ru-RU" sz="1000" dirty="0">
-                        <a:effectLst/>
-                        <a:latin typeface="T2 Rooftop" pitchFamily="2" charset="0"/>
-                      </a:endParaRPr>
-                    </a:p>
-                  </a:txBody>
-                  <a:tcPr/>
-                </a:tc>
-                <a:tc>
-                  <a:txBody>
-                    <a:bodyPr/>
-                    <a:lstStyle/>
-                    <a:p>
-                      <a:pPr marL="0" marR="0" indent="0" algn="l" defTabSz="914400" rtl="0" eaLnBrk="1" fontAlgn="auto" latinLnBrk="0" hangingPunct="1">
-                        <a:lnSpc>
-                          <a:spcPct val="100000"/>
-                        </a:lnSpc>
-                        <a:spcBef>
-                          <a:spcPts val="0"/>
-                        </a:spcBef>
-                        <a:spcAft>
-                          <a:spcPts val="0"/>
-                        </a:spcAft>
-                        <a:buClrTx/>
-                        <a:buSzTx/>
-                        <a:buFontTx/>
-                        <a:buNone/>
-                        <a:tabLst/>
-                        <a:defRPr/>
-                      </a:pPr>
-                      <a:endParaRPr lang="ru-RU" sz="800" dirty="0">
-                        <a:latin typeface="T2 Rooftop" pitchFamily="2" charset="0"/>
-                      </a:endParaRPr>
-                    </a:p>
-                  </a:txBody>
-                  <a:tcPr/>
-                </a:tc>
-                <a:extLst>
-                  <a:ext uri="{0D108BD9-81ED-4DB2-BD59-A6C34878D82A}">
-                    <a16:rowId xmlns:a16="http://schemas.microsoft.com/office/drawing/2014/main" val="2216252288"/>
-                  </a:ext>
-                </a:extLst>
-              </a:tr>
-              <a:tr h="370840">
-                <a:tc>
-                  <a:txBody>
-                    <a:bodyPr/>
-                    <a:lstStyle/>
-                    <a:p>
-                      <a:pPr rtl="0"/>
-                      <a:r>
-                        <a:rPr lang="ru-RU" sz="1000" dirty="0">
-                          <a:latin typeface="T2 Rooftop" pitchFamily="2" charset="0"/>
-                        </a:rPr>
-                        <a:t>0</a:t>
-                      </a:r>
-                      <a:r>
-                        <a:rPr lang="en-US" sz="1000" dirty="0">
-                          <a:latin typeface="T2 Rooftop" pitchFamily="2" charset="0"/>
-                        </a:rPr>
-                        <a:t>8</a:t>
-                      </a:r>
-                      <a:r>
-                        <a:rPr lang="ru-RU" sz="1000" dirty="0">
-                          <a:latin typeface="T2 Rooftop" pitchFamily="2" charset="0"/>
-                        </a:rPr>
-                        <a:t>.0</a:t>
-                      </a:r>
-                      <a:r>
-                        <a:rPr lang="en-US" sz="1000" dirty="0">
-                          <a:latin typeface="T2 Rooftop" pitchFamily="2" charset="0"/>
-                        </a:rPr>
-                        <a:t>7</a:t>
-                      </a:r>
-                      <a:endParaRPr lang="ru-RU" sz="1000" dirty="0">
-                        <a:latin typeface="T2 Rooftop" pitchFamily="2" charset="0"/>
-                      </a:endParaRPr>
-                    </a:p>
-                  </a:txBody>
-                  <a:tcPr/>
-                </a:tc>
-                <a:tc>
-                  <a:txBody>
-                    <a:bodyPr/>
-                    <a:lstStyle/>
-                    <a:p>
-                      <a:pPr rtl="0"/>
-                      <a:r>
-                        <a:rPr lang="ru-RU" sz="1000">
-                          <a:latin typeface="T2 Rooftop" pitchFamily="2" charset="0"/>
-                        </a:rPr>
-                        <a:t>CORE</a:t>
-                      </a:r>
-                      <a:endParaRPr lang="ru-RU" sz="1000" dirty="0">
-                        <a:latin typeface="T2 Rooftop" pitchFamily="2" charset="0"/>
-                      </a:endParaRPr>
-                    </a:p>
-                  </a:txBody>
-                  <a:tcPr/>
-                </a:tc>
-                <a:tc>
-                  <a:txBody>
-                    <a:bodyPr/>
-                    <a:lstStyle/>
-                    <a:p>
-                      <a:pPr marL="0" marR="0" lvl="0" indent="0" algn="l" defTabSz="914400" rtl="0" eaLnBrk="1" fontAlgn="auto" latinLnBrk="0" hangingPunct="1">
-                        <a:lnSpc>
-                          <a:spcPct val="100000"/>
-                        </a:lnSpc>
-                        <a:spcBef>
-                          <a:spcPts val="0"/>
-                        </a:spcBef>
-                        <a:spcAft>
-                          <a:spcPts val="0"/>
-                        </a:spcAft>
-                        <a:buClrTx/>
-                        <a:buSzTx/>
-                        <a:buFontTx/>
-                        <a:buNone/>
-                        <a:tabLst/>
-                        <a:defRPr/>
-                      </a:pPr>
-                      <a:r>
-                        <a:rPr lang="ru-RU" sz="1000" dirty="0">
-                          <a:effectLst/>
-                          <a:latin typeface="T2 Rooftop" pitchFamily="2" charset="0"/>
-                        </a:rPr>
-                        <a:t>Завершение акции для новых абонентов с тарифным планом «Мой бизнес </a:t>
-                      </a:r>
-                      <a:r>
-                        <a:rPr lang="ru-RU" sz="1000" dirty="0" err="1">
-                          <a:effectLst/>
-                          <a:latin typeface="T2 Rooftop" pitchFamily="2" charset="0"/>
-                        </a:rPr>
-                        <a:t>M</a:t>
-                      </a:r>
-                      <a:r>
-                        <a:rPr lang="ru-RU" sz="1000" dirty="0">
-                          <a:effectLst/>
-                          <a:latin typeface="T2 Rooftop" pitchFamily="2" charset="0"/>
-                        </a:rPr>
-                        <a:t>»</a:t>
-                      </a:r>
-                    </a:p>
-                  </a:txBody>
-                  <a:tcPr/>
-                </a:tc>
-                <a:tc>
-                  <a:txBody>
-                    <a:bodyPr/>
-                    <a:lstStyle/>
-                    <a:p>
-                      <a:pPr rtl="0"/>
-                      <a:r>
-                        <a:rPr lang="ru-RU" sz="800" dirty="0">
-                          <a:latin typeface="T2 Rooftop" pitchFamily="2" charset="0"/>
-                        </a:rPr>
-                        <a:t>Безлимиты в публике за 300 руб.</a:t>
-                      </a:r>
-                    </a:p>
-                  </a:txBody>
-                  <a:tcPr/>
-                </a:tc>
-                <a:extLst>
-                  <a:ext uri="{0D108BD9-81ED-4DB2-BD59-A6C34878D82A}">
-                    <a16:rowId xmlns:a16="http://schemas.microsoft.com/office/drawing/2014/main" val="2810807929"/>
-                  </a:ext>
-                </a:extLst>
-              </a:tr>
-            </a:tbl>
-          </a:graphicData>
-        </a:graphic>
-      </p:graphicFrame>
-      <p:sp>
-        <p:nvSpPr>
-          <p:cNvPr id="6" name="Заголовок 1">
-            <a:extLst>
-              <a:ext uri="{FF2B5EF4-FFF2-40B4-BE49-F238E27FC236}">
-                <a16:creationId xmlns:a16="http://schemas.microsoft.com/office/drawing/2014/main" id="{E92E4406-9207-1165-3AEE-A0794FB65D15}"/>
-              </a:ext>
-            </a:extLst>
-          </p:cNvPr>
-          <p:cNvSpPr txBox="1">
-            <a:spLocks/>
-          </p:cNvSpPr>
-          <p:nvPr/>
-        </p:nvSpPr>
-        <p:spPr>
-          <a:xfrm>
-            <a:off x="511884" y="1924555"/>
-            <a:ext cx="10515600" cy="504451"/>
-          </a:xfrm>
-          <a:prstGeom prst="rect">
-            <a:avLst/>
-          </a:prstGeom>
-        </p:spPr>
-        <p:txBody>
-          <a:bodyPr vert="horz" lIns="91440" tIns="45720" rIns="91440" bIns="45720" rtlCol="0" anchor="ctr">
-            <a:normAutofit fontScale="82500" lnSpcReduction="20000"/>
-          </a:bodyPr>
-          <a:lstStyle>
-            <a:lvl1pPr algn="l" defTabSz="914400" rtl="0" eaLnBrk="1" latinLnBrk="0" hangingPunct="1">
-              <a:lnSpc>
-                <a:spcPct val="90000"/>
-              </a:lnSpc>
-              <a:spcBef>
-                <a:spcPct val="0"/>
-              </a:spcBef>
-              <a:buNone/>
-              <a:defRPr sz="4400" kern="1200">
-                <a:solidFill>
-                  <a:schemeClr val="tx1"/>
-                </a:solidFill>
-                <a:latin typeface="+mj-lt"/>
-                <a:ea typeface="+mj-ea"/>
-                <a:cs typeface="+mj-cs"/>
-              </a:defRPr>
-            </a:lvl1pPr>
-          </a:lstStyle>
-          <a:p>
-            <a:r>
-              <a:rPr lang="ru-RU">
-                <a:latin typeface="T2 Halvar Breit ExtraBold" pitchFamily="2" charset="0"/>
-              </a:rPr>
-              <a:t>Запуски</a:t>
             </a:r>
           </a:p>
         </p:txBody>
@@ -8970,73 +7495,6 @@
           <a:chExt cx="0" cy="0"/>
         </a:xfrm>
       </p:grpSpPr>
-      <p:graphicFrame>
-        <p:nvGraphicFramePr>
-          <p:cNvPr id="4" name="think-cell data - do not delete" hidden="1">
-            <a:extLst>
-              <a:ext uri="{FF2B5EF4-FFF2-40B4-BE49-F238E27FC236}">
-                <a16:creationId xmlns:a16="http://schemas.microsoft.com/office/drawing/2014/main" id="{7749785B-1E84-A07D-37DB-AE846CB688C0}"/>
-              </a:ext>
-            </a:extLst>
-          </p:cNvPr>
-          <p:cNvGraphicFramePr>
-            <a:graphicFrameLocks/>
-          </p:cNvGraphicFramePr>
-          <p:nvPr>
-            <p:custDataLst>
-              <p:tags r:id="rId1"/>
-            </p:custDataLst>
-          </p:nvPr>
-        </p:nvGraphicFramePr>
-        <p:xfrm>
-          <a:off x="1588" y="1588"/>
-          <a:ext cx="1227" cy="1588"/>
-        </p:xfrm>
-        <a:graphic>
-          <a:graphicData uri="http://schemas.openxmlformats.org/presentationml/2006/ole">
-            <mc:AlternateContent xmlns:mc="http://schemas.openxmlformats.org/markup-compatibility/2006">
-              <mc:Choice xmlns:v="urn:schemas-microsoft-com:vml" Requires="v">
-                <p:oleObj name="Слайд think-cell" r:id="rId4" imgW="7772400" imgH="10058400" progId="TCLayout.ActiveDocument.1">
-                  <p:embed/>
-                </p:oleObj>
-              </mc:Choice>
-              <mc:Fallback>
-                <p:oleObj name="Слайд think-cell" r:id="rId4" imgW="7772400" imgH="10058400" progId="TCLayout.ActiveDocument.1">
-                  <p:embed/>
-                  <p:pic>
-                    <p:nvPicPr>
-                      <p:cNvPr id="4" name="think-cell data - do not delete" hidden="1">
-                        <a:extLst>
-                          <a:ext uri="{FF2B5EF4-FFF2-40B4-BE49-F238E27FC236}">
-                            <a16:creationId xmlns:a16="http://schemas.microsoft.com/office/drawing/2014/main" id="{841FA807-C080-224A-691C-FDC3E33DDB99}"/>
-                          </a:ext>
-                        </a:extLst>
-                      </p:cNvPr>
-                      <p:cNvPicPr/>
-                      <p:nvPr/>
-                    </p:nvPicPr>
-                    <p:blipFill>
-                      <a:blip r:embed="rId5"/>
-                      <a:stretch>
-                        <a:fillRect/>
-                      </a:stretch>
-                    </p:blipFill>
-                    <p:spPr>
-                      <a:xfrm>
-                        <a:off x="1588" y="1588"/>
-                        <a:ext cx="1227" cy="1588"/>
-                      </a:xfrm>
-                      <a:prstGeom prst="rect">
-                        <a:avLst/>
-                      </a:prstGeom>
-                    </p:spPr>
-                  </p:pic>
-                </p:oleObj>
-              </mc:Fallback>
-            </mc:AlternateContent>
-          </a:graphicData>
-        </a:graphic>
-      </p:graphicFrame>
       <p:sp>
         <p:nvSpPr>
           <p:cNvPr id="2" name="Заголовок 1">
@@ -10935,73 +9393,6 @@
           <a:chExt cx="0" cy="0"/>
         </a:xfrm>
       </p:grpSpPr>
-      <p:graphicFrame>
-        <p:nvGraphicFramePr>
-          <p:cNvPr id="4" name="think-cell data - do not delete" hidden="1">
-            <a:extLst>
-              <a:ext uri="{FF2B5EF4-FFF2-40B4-BE49-F238E27FC236}">
-                <a16:creationId xmlns:a16="http://schemas.microsoft.com/office/drawing/2014/main" id="{F40B38FC-7F2D-9C23-8E0E-9CB8C2579EA9}"/>
-              </a:ext>
-            </a:extLst>
-          </p:cNvPr>
-          <p:cNvGraphicFramePr>
-            <a:graphicFrameLocks/>
-          </p:cNvGraphicFramePr>
-          <p:nvPr>
-            <p:custDataLst>
-              <p:tags r:id="rId1"/>
-            </p:custDataLst>
-          </p:nvPr>
-        </p:nvGraphicFramePr>
-        <p:xfrm>
-          <a:off x="1588" y="1588"/>
-          <a:ext cx="1227" cy="1588"/>
-        </p:xfrm>
-        <a:graphic>
-          <a:graphicData uri="http://schemas.openxmlformats.org/presentationml/2006/ole">
-            <mc:AlternateContent xmlns:mc="http://schemas.openxmlformats.org/markup-compatibility/2006">
-              <mc:Choice xmlns:v="urn:schemas-microsoft-com:vml" Requires="v">
-                <p:oleObj name="Слайд think-cell" r:id="rId4" imgW="7772400" imgH="10058400" progId="TCLayout.ActiveDocument.1">
-                  <p:embed/>
-                </p:oleObj>
-              </mc:Choice>
-              <mc:Fallback>
-                <p:oleObj name="Слайд think-cell" r:id="rId4" imgW="7772400" imgH="10058400" progId="TCLayout.ActiveDocument.1">
-                  <p:embed/>
-                  <p:pic>
-                    <p:nvPicPr>
-                      <p:cNvPr id="4" name="think-cell data - do not delete" hidden="1">
-                        <a:extLst>
-                          <a:ext uri="{FF2B5EF4-FFF2-40B4-BE49-F238E27FC236}">
-                            <a16:creationId xmlns:a16="http://schemas.microsoft.com/office/drawing/2014/main" id="{7749785B-1E84-A07D-37DB-AE846CB688C0}"/>
-                          </a:ext>
-                        </a:extLst>
-                      </p:cNvPr>
-                      <p:cNvPicPr/>
-                      <p:nvPr/>
-                    </p:nvPicPr>
-                    <p:blipFill>
-                      <a:blip r:embed="rId5"/>
-                      <a:stretch>
-                        <a:fillRect/>
-                      </a:stretch>
-                    </p:blipFill>
-                    <p:spPr>
-                      <a:xfrm>
-                        <a:off x="1588" y="1588"/>
-                        <a:ext cx="1227" cy="1588"/>
-                      </a:xfrm>
-                      <a:prstGeom prst="rect">
-                        <a:avLst/>
-                      </a:prstGeom>
-                    </p:spPr>
-                  </p:pic>
-                </p:oleObj>
-              </mc:Fallback>
-            </mc:AlternateContent>
-          </a:graphicData>
-        </a:graphic>
-      </p:graphicFrame>
       <p:sp>
         <p:nvSpPr>
           <p:cNvPr id="2" name="Заголовок 1">
@@ -12512,73 +10903,6 @@
           <a:chExt cx="0" cy="0"/>
         </a:xfrm>
       </p:grpSpPr>
-      <p:graphicFrame>
-        <p:nvGraphicFramePr>
-          <p:cNvPr id="4" name="think-cell data - do not delete" hidden="1">
-            <a:extLst>
-              <a:ext uri="{FF2B5EF4-FFF2-40B4-BE49-F238E27FC236}">
-                <a16:creationId xmlns:a16="http://schemas.microsoft.com/office/drawing/2014/main" id="{B6A3C344-4DAD-C5D1-DC94-B5FCF85542C6}"/>
-              </a:ext>
-            </a:extLst>
-          </p:cNvPr>
-          <p:cNvGraphicFramePr>
-            <a:graphicFrameLocks/>
-          </p:cNvGraphicFramePr>
-          <p:nvPr>
-            <p:custDataLst>
-              <p:tags r:id="rId1"/>
-            </p:custDataLst>
-          </p:nvPr>
-        </p:nvGraphicFramePr>
-        <p:xfrm>
-          <a:off x="1588" y="1588"/>
-          <a:ext cx="1227" cy="1588"/>
-        </p:xfrm>
-        <a:graphic>
-          <a:graphicData uri="http://schemas.openxmlformats.org/presentationml/2006/ole">
-            <mc:AlternateContent xmlns:mc="http://schemas.openxmlformats.org/markup-compatibility/2006">
-              <mc:Choice xmlns:v="urn:schemas-microsoft-com:vml" Requires="v">
-                <p:oleObj name="Слайд think-cell" r:id="rId4" imgW="7772400" imgH="10058400" progId="TCLayout.ActiveDocument.1">
-                  <p:embed/>
-                </p:oleObj>
-              </mc:Choice>
-              <mc:Fallback>
-                <p:oleObj name="Слайд think-cell" r:id="rId4" imgW="7772400" imgH="10058400" progId="TCLayout.ActiveDocument.1">
-                  <p:embed/>
-                  <p:pic>
-                    <p:nvPicPr>
-                      <p:cNvPr id="4" name="think-cell data - do not delete" hidden="1">
-                        <a:extLst>
-                          <a:ext uri="{FF2B5EF4-FFF2-40B4-BE49-F238E27FC236}">
-                            <a16:creationId xmlns:a16="http://schemas.microsoft.com/office/drawing/2014/main" id="{F40B38FC-7F2D-9C23-8E0E-9CB8C2579EA9}"/>
-                          </a:ext>
-                        </a:extLst>
-                      </p:cNvPr>
-                      <p:cNvPicPr/>
-                      <p:nvPr/>
-                    </p:nvPicPr>
-                    <p:blipFill>
-                      <a:blip r:embed="rId5"/>
-                      <a:stretch>
-                        <a:fillRect/>
-                      </a:stretch>
-                    </p:blipFill>
-                    <p:spPr>
-                      <a:xfrm>
-                        <a:off x="1588" y="1588"/>
-                        <a:ext cx="1227" cy="1588"/>
-                      </a:xfrm>
-                      <a:prstGeom prst="rect">
-                        <a:avLst/>
-                      </a:prstGeom>
-                    </p:spPr>
-                  </p:pic>
-                </p:oleObj>
-              </mc:Fallback>
-            </mc:AlternateContent>
-          </a:graphicData>
-        </a:graphic>
-      </p:graphicFrame>
       <p:sp>
         <p:nvSpPr>
           <p:cNvPr id="2" name="Заголовок 1">
@@ -13914,73 +12238,6 @@
           <a:chExt cx="0" cy="0"/>
         </a:xfrm>
       </p:grpSpPr>
-      <p:graphicFrame>
-        <p:nvGraphicFramePr>
-          <p:cNvPr id="4" name="think-cell data - do not delete" hidden="1">
-            <a:extLst>
-              <a:ext uri="{FF2B5EF4-FFF2-40B4-BE49-F238E27FC236}">
-                <a16:creationId xmlns:a16="http://schemas.microsoft.com/office/drawing/2014/main" id="{201EDA58-7E02-7259-B64F-41448A1E0AEF}"/>
-              </a:ext>
-            </a:extLst>
-          </p:cNvPr>
-          <p:cNvGraphicFramePr>
-            <a:graphicFrameLocks/>
-          </p:cNvGraphicFramePr>
-          <p:nvPr>
-            <p:custDataLst>
-              <p:tags r:id="rId1"/>
-            </p:custDataLst>
-          </p:nvPr>
-        </p:nvGraphicFramePr>
-        <p:xfrm>
-          <a:off x="1588" y="1588"/>
-          <a:ext cx="1227" cy="1588"/>
-        </p:xfrm>
-        <a:graphic>
-          <a:graphicData uri="http://schemas.openxmlformats.org/presentationml/2006/ole">
-            <mc:AlternateContent xmlns:mc="http://schemas.openxmlformats.org/markup-compatibility/2006">
-              <mc:Choice xmlns:v="urn:schemas-microsoft-com:vml" Requires="v">
-                <p:oleObj name="Слайд think-cell" r:id="rId4" imgW="7772400" imgH="10058400" progId="TCLayout.ActiveDocument.1">
-                  <p:embed/>
-                </p:oleObj>
-              </mc:Choice>
-              <mc:Fallback>
-                <p:oleObj name="Слайд think-cell" r:id="rId4" imgW="7772400" imgH="10058400" progId="TCLayout.ActiveDocument.1">
-                  <p:embed/>
-                  <p:pic>
-                    <p:nvPicPr>
-                      <p:cNvPr id="4" name="think-cell data - do not delete" hidden="1">
-                        <a:extLst>
-                          <a:ext uri="{FF2B5EF4-FFF2-40B4-BE49-F238E27FC236}">
-                            <a16:creationId xmlns:a16="http://schemas.microsoft.com/office/drawing/2014/main" id="{B6A3C344-4DAD-C5D1-DC94-B5FCF85542C6}"/>
-                          </a:ext>
-                        </a:extLst>
-                      </p:cNvPr>
-                      <p:cNvPicPr/>
-                      <p:nvPr/>
-                    </p:nvPicPr>
-                    <p:blipFill>
-                      <a:blip r:embed="rId5"/>
-                      <a:stretch>
-                        <a:fillRect/>
-                      </a:stretch>
-                    </p:blipFill>
-                    <p:spPr>
-                      <a:xfrm>
-                        <a:off x="1588" y="1588"/>
-                        <a:ext cx="1227" cy="1588"/>
-                      </a:xfrm>
-                      <a:prstGeom prst="rect">
-                        <a:avLst/>
-                      </a:prstGeom>
-                    </p:spPr>
-                  </p:pic>
-                </p:oleObj>
-              </mc:Fallback>
-            </mc:AlternateContent>
-          </a:graphicData>
-        </a:graphic>
-      </p:graphicFrame>
       <p:sp>
         <p:nvSpPr>
           <p:cNvPr id="2" name="Заголовок 1">
@@ -15283,73 +13540,6 @@
           <a:chExt cx="0" cy="0"/>
         </a:xfrm>
       </p:grpSpPr>
-      <p:graphicFrame>
-        <p:nvGraphicFramePr>
-          <p:cNvPr id="4" name="think-cell data - do not delete" hidden="1">
-            <a:extLst>
-              <a:ext uri="{FF2B5EF4-FFF2-40B4-BE49-F238E27FC236}">
-                <a16:creationId xmlns:a16="http://schemas.microsoft.com/office/drawing/2014/main" id="{9D439B65-D82F-3B90-397C-13642B7ED8D0}"/>
-              </a:ext>
-            </a:extLst>
-          </p:cNvPr>
-          <p:cNvGraphicFramePr>
-            <a:graphicFrameLocks/>
-          </p:cNvGraphicFramePr>
-          <p:nvPr>
-            <p:custDataLst>
-              <p:tags r:id="rId1"/>
-            </p:custDataLst>
-          </p:nvPr>
-        </p:nvGraphicFramePr>
-        <p:xfrm>
-          <a:off x="1588" y="1588"/>
-          <a:ext cx="1227" cy="1588"/>
-        </p:xfrm>
-        <a:graphic>
-          <a:graphicData uri="http://schemas.openxmlformats.org/presentationml/2006/ole">
-            <mc:AlternateContent xmlns:mc="http://schemas.openxmlformats.org/markup-compatibility/2006">
-              <mc:Choice xmlns:v="urn:schemas-microsoft-com:vml" Requires="v">
-                <p:oleObj name="Слайд think-cell" r:id="rId4" imgW="7772400" imgH="10058400" progId="TCLayout.ActiveDocument.1">
-                  <p:embed/>
-                </p:oleObj>
-              </mc:Choice>
-              <mc:Fallback>
-                <p:oleObj name="Слайд think-cell" r:id="rId4" imgW="7772400" imgH="10058400" progId="TCLayout.ActiveDocument.1">
-                  <p:embed/>
-                  <p:pic>
-                    <p:nvPicPr>
-                      <p:cNvPr id="4" name="think-cell data - do not delete" hidden="1">
-                        <a:extLst>
-                          <a:ext uri="{FF2B5EF4-FFF2-40B4-BE49-F238E27FC236}">
-                            <a16:creationId xmlns:a16="http://schemas.microsoft.com/office/drawing/2014/main" id="{201EDA58-7E02-7259-B64F-41448A1E0AEF}"/>
-                          </a:ext>
-                        </a:extLst>
-                      </p:cNvPr>
-                      <p:cNvPicPr/>
-                      <p:nvPr/>
-                    </p:nvPicPr>
-                    <p:blipFill>
-                      <a:blip r:embed="rId5"/>
-                      <a:stretch>
-                        <a:fillRect/>
-                      </a:stretch>
-                    </p:blipFill>
-                    <p:spPr>
-                      <a:xfrm>
-                        <a:off x="1588" y="1588"/>
-                        <a:ext cx="1227" cy="1588"/>
-                      </a:xfrm>
-                      <a:prstGeom prst="rect">
-                        <a:avLst/>
-                      </a:prstGeom>
-                    </p:spPr>
-                  </p:pic>
-                </p:oleObj>
-              </mc:Fallback>
-            </mc:AlternateContent>
-          </a:graphicData>
-        </a:graphic>
-      </p:graphicFrame>
       <p:sp>
         <p:nvSpPr>
           <p:cNvPr id="2" name="Заголовок 1">
@@ -16535,73 +14725,6 @@
           <a:chExt cx="0" cy="0"/>
         </a:xfrm>
       </p:grpSpPr>
-      <p:graphicFrame>
-        <p:nvGraphicFramePr>
-          <p:cNvPr id="4" name="think-cell data - do not delete" hidden="1">
-            <a:extLst>
-              <a:ext uri="{FF2B5EF4-FFF2-40B4-BE49-F238E27FC236}">
-                <a16:creationId xmlns:a16="http://schemas.microsoft.com/office/drawing/2014/main" id="{0F01BFC0-D48C-41A8-A749-7EC961AD9D8F}"/>
-              </a:ext>
-            </a:extLst>
-          </p:cNvPr>
-          <p:cNvGraphicFramePr>
-            <a:graphicFrameLocks/>
-          </p:cNvGraphicFramePr>
-          <p:nvPr>
-            <p:custDataLst>
-              <p:tags r:id="rId1"/>
-            </p:custDataLst>
-          </p:nvPr>
-        </p:nvGraphicFramePr>
-        <p:xfrm>
-          <a:off x="1588" y="1588"/>
-          <a:ext cx="1227" cy="1588"/>
-        </p:xfrm>
-        <a:graphic>
-          <a:graphicData uri="http://schemas.openxmlformats.org/presentationml/2006/ole">
-            <mc:AlternateContent xmlns:mc="http://schemas.openxmlformats.org/markup-compatibility/2006">
-              <mc:Choice xmlns:v="urn:schemas-microsoft-com:vml" Requires="v">
-                <p:oleObj name="Слайд think-cell" r:id="rId4" imgW="7772400" imgH="10058400" progId="TCLayout.ActiveDocument.1">
-                  <p:embed/>
-                </p:oleObj>
-              </mc:Choice>
-              <mc:Fallback>
-                <p:oleObj name="Слайд think-cell" r:id="rId4" imgW="7772400" imgH="10058400" progId="TCLayout.ActiveDocument.1">
-                  <p:embed/>
-                  <p:pic>
-                    <p:nvPicPr>
-                      <p:cNvPr id="4" name="think-cell data - do not delete" hidden="1">
-                        <a:extLst>
-                          <a:ext uri="{FF2B5EF4-FFF2-40B4-BE49-F238E27FC236}">
-                            <a16:creationId xmlns:a16="http://schemas.microsoft.com/office/drawing/2014/main" id="{203B744E-8E56-5E15-9422-F4FB55C1EAD8}"/>
-                          </a:ext>
-                        </a:extLst>
-                      </p:cNvPr>
-                      <p:cNvPicPr/>
-                      <p:nvPr/>
-                    </p:nvPicPr>
-                    <p:blipFill>
-                      <a:blip r:embed="rId5"/>
-                      <a:stretch>
-                        <a:fillRect/>
-                      </a:stretch>
-                    </p:blipFill>
-                    <p:spPr>
-                      <a:xfrm>
-                        <a:off x="1588" y="1588"/>
-                        <a:ext cx="1227" cy="1588"/>
-                      </a:xfrm>
-                      <a:prstGeom prst="rect">
-                        <a:avLst/>
-                      </a:prstGeom>
-                    </p:spPr>
-                  </p:pic>
-                </p:oleObj>
-              </mc:Fallback>
-            </mc:AlternateContent>
-          </a:graphicData>
-        </a:graphic>
-      </p:graphicFrame>
       <p:sp>
         <p:nvSpPr>
           <p:cNvPr id="2" name="Заголовок 1">
@@ -17828,73 +15951,6 @@
           <a:chExt cx="0" cy="0"/>
         </a:xfrm>
       </p:grpSpPr>
-      <p:graphicFrame>
-        <p:nvGraphicFramePr>
-          <p:cNvPr id="4" name="think-cell data - do not delete" hidden="1">
-            <a:extLst>
-              <a:ext uri="{FF2B5EF4-FFF2-40B4-BE49-F238E27FC236}">
-                <a16:creationId xmlns:a16="http://schemas.microsoft.com/office/drawing/2014/main" id="{519F17F3-1713-3DD5-F946-2EDD83776E4D}"/>
-              </a:ext>
-            </a:extLst>
-          </p:cNvPr>
-          <p:cNvGraphicFramePr>
-            <a:graphicFrameLocks/>
-          </p:cNvGraphicFramePr>
-          <p:nvPr>
-            <p:custDataLst>
-              <p:tags r:id="rId1"/>
-            </p:custDataLst>
-          </p:nvPr>
-        </p:nvGraphicFramePr>
-        <p:xfrm>
-          <a:off x="1588" y="1588"/>
-          <a:ext cx="1227" cy="1588"/>
-        </p:xfrm>
-        <a:graphic>
-          <a:graphicData uri="http://schemas.openxmlformats.org/presentationml/2006/ole">
-            <mc:AlternateContent xmlns:mc="http://schemas.openxmlformats.org/markup-compatibility/2006">
-              <mc:Choice xmlns:v="urn:schemas-microsoft-com:vml" Requires="v">
-                <p:oleObj name="Слайд think-cell" r:id="rId4" imgW="7772400" imgH="10058400" progId="TCLayout.ActiveDocument.1">
-                  <p:embed/>
-                </p:oleObj>
-              </mc:Choice>
-              <mc:Fallback>
-                <p:oleObj name="Слайд think-cell" r:id="rId4" imgW="7772400" imgH="10058400" progId="TCLayout.ActiveDocument.1">
-                  <p:embed/>
-                  <p:pic>
-                    <p:nvPicPr>
-                      <p:cNvPr id="4" name="think-cell data - do not delete" hidden="1">
-                        <a:extLst>
-                          <a:ext uri="{FF2B5EF4-FFF2-40B4-BE49-F238E27FC236}">
-                            <a16:creationId xmlns:a16="http://schemas.microsoft.com/office/drawing/2014/main" id="{0F01BFC0-D48C-41A8-A749-7EC961AD9D8F}"/>
-                          </a:ext>
-                        </a:extLst>
-                      </p:cNvPr>
-                      <p:cNvPicPr/>
-                      <p:nvPr/>
-                    </p:nvPicPr>
-                    <p:blipFill>
-                      <a:blip r:embed="rId5"/>
-                      <a:stretch>
-                        <a:fillRect/>
-                      </a:stretch>
-                    </p:blipFill>
-                    <p:spPr>
-                      <a:xfrm>
-                        <a:off x="1588" y="1588"/>
-                        <a:ext cx="1227" cy="1588"/>
-                      </a:xfrm>
-                      <a:prstGeom prst="rect">
-                        <a:avLst/>
-                      </a:prstGeom>
-                    </p:spPr>
-                  </p:pic>
-                </p:oleObj>
-              </mc:Fallback>
-            </mc:AlternateContent>
-          </a:graphicData>
-        </a:graphic>
-      </p:graphicFrame>
       <p:sp>
         <p:nvSpPr>
           <p:cNvPr id="2" name="Заголовок 1">
@@ -19336,73 +17392,6 @@
           <a:chExt cx="0" cy="0"/>
         </a:xfrm>
       </p:grpSpPr>
-      <p:graphicFrame>
-        <p:nvGraphicFramePr>
-          <p:cNvPr id="4" name="think-cell data - do not delete" hidden="1">
-            <a:extLst>
-              <a:ext uri="{FF2B5EF4-FFF2-40B4-BE49-F238E27FC236}">
-                <a16:creationId xmlns:a16="http://schemas.microsoft.com/office/drawing/2014/main" id="{90F45E61-CE2C-9703-35DE-2486A8D44978}"/>
-              </a:ext>
-            </a:extLst>
-          </p:cNvPr>
-          <p:cNvGraphicFramePr>
-            <a:graphicFrameLocks/>
-          </p:cNvGraphicFramePr>
-          <p:nvPr>
-            <p:custDataLst>
-              <p:tags r:id="rId1"/>
-            </p:custDataLst>
-          </p:nvPr>
-        </p:nvGraphicFramePr>
-        <p:xfrm>
-          <a:off x="1588" y="1588"/>
-          <a:ext cx="1227" cy="1588"/>
-        </p:xfrm>
-        <a:graphic>
-          <a:graphicData uri="http://schemas.openxmlformats.org/presentationml/2006/ole">
-            <mc:AlternateContent xmlns:mc="http://schemas.openxmlformats.org/markup-compatibility/2006">
-              <mc:Choice xmlns:v="urn:schemas-microsoft-com:vml" Requires="v">
-                <p:oleObj name="Слайд think-cell" r:id="rId4" imgW="7772400" imgH="10058400" progId="TCLayout.ActiveDocument.1">
-                  <p:embed/>
-                </p:oleObj>
-              </mc:Choice>
-              <mc:Fallback>
-                <p:oleObj name="Слайд think-cell" r:id="rId4" imgW="7772400" imgH="10058400" progId="TCLayout.ActiveDocument.1">
-                  <p:embed/>
-                  <p:pic>
-                    <p:nvPicPr>
-                      <p:cNvPr id="4" name="think-cell data - do not delete" hidden="1">
-                        <a:extLst>
-                          <a:ext uri="{FF2B5EF4-FFF2-40B4-BE49-F238E27FC236}">
-                            <a16:creationId xmlns:a16="http://schemas.microsoft.com/office/drawing/2014/main" id="{519F17F3-1713-3DD5-F946-2EDD83776E4D}"/>
-                          </a:ext>
-                        </a:extLst>
-                      </p:cNvPr>
-                      <p:cNvPicPr/>
-                      <p:nvPr/>
-                    </p:nvPicPr>
-                    <p:blipFill>
-                      <a:blip r:embed="rId5"/>
-                      <a:stretch>
-                        <a:fillRect/>
-                      </a:stretch>
-                    </p:blipFill>
-                    <p:spPr>
-                      <a:xfrm>
-                        <a:off x="1588" y="1588"/>
-                        <a:ext cx="1227" cy="1588"/>
-                      </a:xfrm>
-                      <a:prstGeom prst="rect">
-                        <a:avLst/>
-                      </a:prstGeom>
-                    </p:spPr>
-                  </p:pic>
-                </p:oleObj>
-              </mc:Fallback>
-            </mc:AlternateContent>
-          </a:graphicData>
-        </a:graphic>
-      </p:graphicFrame>
       <p:sp>
         <p:nvSpPr>
           <p:cNvPr id="2" name="Заголовок 1">
@@ -19471,7 +17460,7 @@
         </p:nvGraphicFramePr>
         <p:xfrm>
           <a:off x="694764" y="943783"/>
-          <a:ext cx="11031071" cy="5504688"/>
+          <a:ext cx="11031071" cy="1958400"/>
         </p:xfrm>
         <a:graphic>
           <a:graphicData uri="http://schemas.openxmlformats.org/drawingml/2006/table">
@@ -19852,7 +17841,7 @@
                   </a:ext>
                 </a:extLst>
               </a:tr>
-              <a:tr h="0">
+              <a:tr h="244800">
                 <a:tc>
                   <a:txBody>
                     <a:bodyPr/>
@@ -19959,7 +17948,7 @@
                   </a:ext>
                 </a:extLst>
               </a:tr>
-              <a:tr h="0">
+              <a:tr h="244800">
                 <a:tc>
                   <a:txBody>
                     <a:bodyPr/>
@@ -20159,7 +18148,7 @@
                   </a:ext>
                 </a:extLst>
               </a:tr>
-              <a:tr h="0">
+              <a:tr h="244800">
                 <a:tc>
                   <a:txBody>
                     <a:bodyPr/>
@@ -20333,7 +18322,7 @@
                   </a:ext>
                 </a:extLst>
               </a:tr>
-              <a:tr h="0">
+              <a:tr h="244800">
                 <a:tc>
                   <a:txBody>
                     <a:bodyPr/>
@@ -20484,7 +18473,7 @@
                   </a:ext>
                 </a:extLst>
               </a:tr>
-              <a:tr h="0">
+              <a:tr h="244800">
                 <a:tc>
                   <a:txBody>
                     <a:bodyPr/>
@@ -20649,73 +18638,6 @@
           <a:chExt cx="0" cy="0"/>
         </a:xfrm>
       </p:grpSpPr>
-      <p:graphicFrame>
-        <p:nvGraphicFramePr>
-          <p:cNvPr id="4" name="think-cell data - do not delete" hidden="1">
-            <a:extLst>
-              <a:ext uri="{FF2B5EF4-FFF2-40B4-BE49-F238E27FC236}">
-                <a16:creationId xmlns:a16="http://schemas.microsoft.com/office/drawing/2014/main" id="{D9FF3E51-2CFC-9C63-A7D8-AF94DD8484D7}"/>
-              </a:ext>
-            </a:extLst>
-          </p:cNvPr>
-          <p:cNvGraphicFramePr>
-            <a:graphicFrameLocks/>
-          </p:cNvGraphicFramePr>
-          <p:nvPr>
-            <p:custDataLst>
-              <p:tags r:id="rId1"/>
-            </p:custDataLst>
-          </p:nvPr>
-        </p:nvGraphicFramePr>
-        <p:xfrm>
-          <a:off x="1588" y="1588"/>
-          <a:ext cx="1227" cy="1588"/>
-        </p:xfrm>
-        <a:graphic>
-          <a:graphicData uri="http://schemas.openxmlformats.org/presentationml/2006/ole">
-            <mc:AlternateContent xmlns:mc="http://schemas.openxmlformats.org/markup-compatibility/2006">
-              <mc:Choice xmlns:v="urn:schemas-microsoft-com:vml" Requires="v">
-                <p:oleObj name="Слайд think-cell" r:id="rId4" imgW="7772400" imgH="10058400" progId="TCLayout.ActiveDocument.1">
-                  <p:embed/>
-                </p:oleObj>
-              </mc:Choice>
-              <mc:Fallback>
-                <p:oleObj name="Слайд think-cell" r:id="rId4" imgW="7772400" imgH="10058400" progId="TCLayout.ActiveDocument.1">
-                  <p:embed/>
-                  <p:pic>
-                    <p:nvPicPr>
-                      <p:cNvPr id="4" name="think-cell data - do not delete" hidden="1">
-                        <a:extLst>
-                          <a:ext uri="{FF2B5EF4-FFF2-40B4-BE49-F238E27FC236}">
-                            <a16:creationId xmlns:a16="http://schemas.microsoft.com/office/drawing/2014/main" id="{90F45E61-CE2C-9703-35DE-2486A8D44978}"/>
-                          </a:ext>
-                        </a:extLst>
-                      </p:cNvPr>
-                      <p:cNvPicPr/>
-                      <p:nvPr/>
-                    </p:nvPicPr>
-                    <p:blipFill>
-                      <a:blip r:embed="rId5"/>
-                      <a:stretch>
-                        <a:fillRect/>
-                      </a:stretch>
-                    </p:blipFill>
-                    <p:spPr>
-                      <a:xfrm>
-                        <a:off x="1588" y="1588"/>
-                        <a:ext cx="1227" cy="1588"/>
-                      </a:xfrm>
-                      <a:prstGeom prst="rect">
-                        <a:avLst/>
-                      </a:prstGeom>
-                    </p:spPr>
-                  </p:pic>
-                </p:oleObj>
-              </mc:Fallback>
-            </mc:AlternateContent>
-          </a:graphicData>
-        </a:graphic>
-      </p:graphicFrame>
       <p:sp>
         <p:nvSpPr>
           <p:cNvPr id="2" name="Заголовок 1">
@@ -21246,73 +19168,6 @@
           <a:chExt cx="0" cy="0"/>
         </a:xfrm>
       </p:grpSpPr>
-      <p:graphicFrame>
-        <p:nvGraphicFramePr>
-          <p:cNvPr id="4" name="think-cell data - do not delete" hidden="1">
-            <a:extLst>
-              <a:ext uri="{FF2B5EF4-FFF2-40B4-BE49-F238E27FC236}">
-                <a16:creationId xmlns:a16="http://schemas.microsoft.com/office/drawing/2014/main" id="{8316EB50-C019-58F7-0A81-F64F7C1D441A}"/>
-              </a:ext>
-            </a:extLst>
-          </p:cNvPr>
-          <p:cNvGraphicFramePr>
-            <a:graphicFrameLocks/>
-          </p:cNvGraphicFramePr>
-          <p:nvPr>
-            <p:custDataLst>
-              <p:tags r:id="rId1"/>
-            </p:custDataLst>
-          </p:nvPr>
-        </p:nvGraphicFramePr>
-        <p:xfrm>
-          <a:off x="1588" y="1588"/>
-          <a:ext cx="1227" cy="1588"/>
-        </p:xfrm>
-        <a:graphic>
-          <a:graphicData uri="http://schemas.openxmlformats.org/presentationml/2006/ole">
-            <mc:AlternateContent xmlns:mc="http://schemas.openxmlformats.org/markup-compatibility/2006">
-              <mc:Choice xmlns:v="urn:schemas-microsoft-com:vml" Requires="v">
-                <p:oleObj name="Слайд think-cell" r:id="rId4" imgW="7772400" imgH="10058400" progId="TCLayout.ActiveDocument.1">
-                  <p:embed/>
-                </p:oleObj>
-              </mc:Choice>
-              <mc:Fallback>
-                <p:oleObj name="Слайд think-cell" r:id="rId4" imgW="7772400" imgH="10058400" progId="TCLayout.ActiveDocument.1">
-                  <p:embed/>
-                  <p:pic>
-                    <p:nvPicPr>
-                      <p:cNvPr id="4" name="think-cell data - do not delete" hidden="1">
-                        <a:extLst>
-                          <a:ext uri="{FF2B5EF4-FFF2-40B4-BE49-F238E27FC236}">
-                            <a16:creationId xmlns:a16="http://schemas.microsoft.com/office/drawing/2014/main" id="{841FA807-C080-224A-691C-FDC3E33DDB99}"/>
-                          </a:ext>
-                        </a:extLst>
-                      </p:cNvPr>
-                      <p:cNvPicPr/>
-                      <p:nvPr/>
-                    </p:nvPicPr>
-                    <p:blipFill>
-                      <a:blip r:embed="rId5"/>
-                      <a:stretch>
-                        <a:fillRect/>
-                      </a:stretch>
-                    </p:blipFill>
-                    <p:spPr>
-                      <a:xfrm>
-                        <a:off x="1588" y="1588"/>
-                        <a:ext cx="1227" cy="1588"/>
-                      </a:xfrm>
-                      <a:prstGeom prst="rect">
-                        <a:avLst/>
-                      </a:prstGeom>
-                    </p:spPr>
-                  </p:pic>
-                </p:oleObj>
-              </mc:Fallback>
-            </mc:AlternateContent>
-          </a:graphicData>
-        </a:graphic>
-      </p:graphicFrame>
       <p:sp>
         <p:nvSpPr>
           <p:cNvPr id="2" name="Заголовок 1">
@@ -22601,73 +20456,6 @@
           <a:chExt cx="0" cy="0"/>
         </a:xfrm>
       </p:grpSpPr>
-      <p:graphicFrame>
-        <p:nvGraphicFramePr>
-          <p:cNvPr id="4" name="think-cell data - do not delete" hidden="1">
-            <a:extLst>
-              <a:ext uri="{FF2B5EF4-FFF2-40B4-BE49-F238E27FC236}">
-                <a16:creationId xmlns:a16="http://schemas.microsoft.com/office/drawing/2014/main" id="{F7DDE8A1-3385-4880-061C-364D7DFD3F05}"/>
-              </a:ext>
-            </a:extLst>
-          </p:cNvPr>
-          <p:cNvGraphicFramePr>
-            <a:graphicFrameLocks/>
-          </p:cNvGraphicFramePr>
-          <p:nvPr>
-            <p:custDataLst>
-              <p:tags r:id="rId1"/>
-            </p:custDataLst>
-          </p:nvPr>
-        </p:nvGraphicFramePr>
-        <p:xfrm>
-          <a:off x="1588" y="1588"/>
-          <a:ext cx="1227" cy="1588"/>
-        </p:xfrm>
-        <a:graphic>
-          <a:graphicData uri="http://schemas.openxmlformats.org/presentationml/2006/ole">
-            <mc:AlternateContent xmlns:mc="http://schemas.openxmlformats.org/markup-compatibility/2006">
-              <mc:Choice xmlns:v="urn:schemas-microsoft-com:vml" Requires="v">
-                <p:oleObj name="Слайд think-cell" r:id="rId4" imgW="7772400" imgH="10058400" progId="TCLayout.ActiveDocument.1">
-                  <p:embed/>
-                </p:oleObj>
-              </mc:Choice>
-              <mc:Fallback>
-                <p:oleObj name="Слайд think-cell" r:id="rId4" imgW="7772400" imgH="10058400" progId="TCLayout.ActiveDocument.1">
-                  <p:embed/>
-                  <p:pic>
-                    <p:nvPicPr>
-                      <p:cNvPr id="4" name="think-cell data - do not delete" hidden="1">
-                        <a:extLst>
-                          <a:ext uri="{FF2B5EF4-FFF2-40B4-BE49-F238E27FC236}">
-                            <a16:creationId xmlns:a16="http://schemas.microsoft.com/office/drawing/2014/main" id="{2068B52E-DBF7-5C52-BB21-470FF1D8CAE2}"/>
-                          </a:ext>
-                        </a:extLst>
-                      </p:cNvPr>
-                      <p:cNvPicPr/>
-                      <p:nvPr/>
-                    </p:nvPicPr>
-                    <p:blipFill>
-                      <a:blip r:embed="rId5"/>
-                      <a:stretch>
-                        <a:fillRect/>
-                      </a:stretch>
-                    </p:blipFill>
-                    <p:spPr>
-                      <a:xfrm>
-                        <a:off x="1588" y="1588"/>
-                        <a:ext cx="1227" cy="1588"/>
-                      </a:xfrm>
-                      <a:prstGeom prst="rect">
-                        <a:avLst/>
-                      </a:prstGeom>
-                    </p:spPr>
-                  </p:pic>
-                </p:oleObj>
-              </mc:Fallback>
-            </mc:AlternateContent>
-          </a:graphicData>
-        </a:graphic>
-      </p:graphicFrame>
       <p:sp>
         <p:nvSpPr>
           <p:cNvPr id="2" name="Заголовок 1">
@@ -24017,73 +21805,6 @@
           <a:chExt cx="0" cy="0"/>
         </a:xfrm>
       </p:grpSpPr>
-      <p:graphicFrame>
-        <p:nvGraphicFramePr>
-          <p:cNvPr id="4" name="think-cell data - do not delete" hidden="1">
-            <a:extLst>
-              <a:ext uri="{FF2B5EF4-FFF2-40B4-BE49-F238E27FC236}">
-                <a16:creationId xmlns:a16="http://schemas.microsoft.com/office/drawing/2014/main" id="{E7CD68C2-FFD8-6BD4-2705-300A4F00E724}"/>
-              </a:ext>
-            </a:extLst>
-          </p:cNvPr>
-          <p:cNvGraphicFramePr>
-            <a:graphicFrameLocks/>
-          </p:cNvGraphicFramePr>
-          <p:nvPr>
-            <p:custDataLst>
-              <p:tags r:id="rId1"/>
-            </p:custDataLst>
-          </p:nvPr>
-        </p:nvGraphicFramePr>
-        <p:xfrm>
-          <a:off x="1588" y="1588"/>
-          <a:ext cx="1227" cy="1588"/>
-        </p:xfrm>
-        <a:graphic>
-          <a:graphicData uri="http://schemas.openxmlformats.org/presentationml/2006/ole">
-            <mc:AlternateContent xmlns:mc="http://schemas.openxmlformats.org/markup-compatibility/2006">
-              <mc:Choice xmlns:v="urn:schemas-microsoft-com:vml" Requires="v">
-                <p:oleObj name="Слайд think-cell" r:id="rId4" imgW="7772400" imgH="10058400" progId="TCLayout.ActiveDocument.1">
-                  <p:embed/>
-                </p:oleObj>
-              </mc:Choice>
-              <mc:Fallback>
-                <p:oleObj name="Слайд think-cell" r:id="rId4" imgW="7772400" imgH="10058400" progId="TCLayout.ActiveDocument.1">
-                  <p:embed/>
-                  <p:pic>
-                    <p:nvPicPr>
-                      <p:cNvPr id="4" name="think-cell data - do not delete" hidden="1">
-                        <a:extLst>
-                          <a:ext uri="{FF2B5EF4-FFF2-40B4-BE49-F238E27FC236}">
-                            <a16:creationId xmlns:a16="http://schemas.microsoft.com/office/drawing/2014/main" id="{8316EB50-C019-58F7-0A81-F64F7C1D441A}"/>
-                          </a:ext>
-                        </a:extLst>
-                      </p:cNvPr>
-                      <p:cNvPicPr/>
-                      <p:nvPr/>
-                    </p:nvPicPr>
-                    <p:blipFill>
-                      <a:blip r:embed="rId5"/>
-                      <a:stretch>
-                        <a:fillRect/>
-                      </a:stretch>
-                    </p:blipFill>
-                    <p:spPr>
-                      <a:xfrm>
-                        <a:off x="1588" y="1588"/>
-                        <a:ext cx="1227" cy="1588"/>
-                      </a:xfrm>
-                      <a:prstGeom prst="rect">
-                        <a:avLst/>
-                      </a:prstGeom>
-                    </p:spPr>
-                  </p:pic>
-                </p:oleObj>
-              </mc:Fallback>
-            </mc:AlternateContent>
-          </a:graphicData>
-        </a:graphic>
-      </p:graphicFrame>
       <p:sp>
         <p:nvSpPr>
           <p:cNvPr id="2" name="Заголовок 1">
@@ -25561,73 +23282,6 @@
           <a:chExt cx="0" cy="0"/>
         </a:xfrm>
       </p:grpSpPr>
-      <p:graphicFrame>
-        <p:nvGraphicFramePr>
-          <p:cNvPr id="4" name="think-cell data - do not delete" hidden="1">
-            <a:extLst>
-              <a:ext uri="{FF2B5EF4-FFF2-40B4-BE49-F238E27FC236}">
-                <a16:creationId xmlns:a16="http://schemas.microsoft.com/office/drawing/2014/main" id="{8BBC57CA-736D-086F-444C-C8F7D410636E}"/>
-              </a:ext>
-            </a:extLst>
-          </p:cNvPr>
-          <p:cNvGraphicFramePr>
-            <a:graphicFrameLocks/>
-          </p:cNvGraphicFramePr>
-          <p:nvPr>
-            <p:custDataLst>
-              <p:tags r:id="rId1"/>
-            </p:custDataLst>
-          </p:nvPr>
-        </p:nvGraphicFramePr>
-        <p:xfrm>
-          <a:off x="1588" y="1588"/>
-          <a:ext cx="1227" cy="1588"/>
-        </p:xfrm>
-        <a:graphic>
-          <a:graphicData uri="http://schemas.openxmlformats.org/presentationml/2006/ole">
-            <mc:AlternateContent xmlns:mc="http://schemas.openxmlformats.org/markup-compatibility/2006">
-              <mc:Choice xmlns:v="urn:schemas-microsoft-com:vml" Requires="v">
-                <p:oleObj name="Слайд think-cell" r:id="rId4" imgW="7772400" imgH="10058400" progId="TCLayout.ActiveDocument.1">
-                  <p:embed/>
-                </p:oleObj>
-              </mc:Choice>
-              <mc:Fallback>
-                <p:oleObj name="Слайд think-cell" r:id="rId4" imgW="7772400" imgH="10058400" progId="TCLayout.ActiveDocument.1">
-                  <p:embed/>
-                  <p:pic>
-                    <p:nvPicPr>
-                      <p:cNvPr id="4" name="think-cell data - do not delete" hidden="1">
-                        <a:extLst>
-                          <a:ext uri="{FF2B5EF4-FFF2-40B4-BE49-F238E27FC236}">
-                            <a16:creationId xmlns:a16="http://schemas.microsoft.com/office/drawing/2014/main" id="{F7DDE8A1-3385-4880-061C-364D7DFD3F05}"/>
-                          </a:ext>
-                        </a:extLst>
-                      </p:cNvPr>
-                      <p:cNvPicPr/>
-                      <p:nvPr/>
-                    </p:nvPicPr>
-                    <p:blipFill>
-                      <a:blip r:embed="rId5"/>
-                      <a:stretch>
-                        <a:fillRect/>
-                      </a:stretch>
-                    </p:blipFill>
-                    <p:spPr>
-                      <a:xfrm>
-                        <a:off x="1588" y="1588"/>
-                        <a:ext cx="1227" cy="1588"/>
-                      </a:xfrm>
-                      <a:prstGeom prst="rect">
-                        <a:avLst/>
-                      </a:prstGeom>
-                    </p:spPr>
-                  </p:pic>
-                </p:oleObj>
-              </mc:Fallback>
-            </mc:AlternateContent>
-          </a:graphicData>
-        </a:graphic>
-      </p:graphicFrame>
       <p:sp>
         <p:nvSpPr>
           <p:cNvPr id="2" name="Заголовок 1">
@@ -27658,73 +25312,6 @@
           <a:chExt cx="0" cy="0"/>
         </a:xfrm>
       </p:grpSpPr>
-      <p:graphicFrame>
-        <p:nvGraphicFramePr>
-          <p:cNvPr id="4" name="think-cell data - do not delete" hidden="1">
-            <a:extLst>
-              <a:ext uri="{FF2B5EF4-FFF2-40B4-BE49-F238E27FC236}">
-                <a16:creationId xmlns:a16="http://schemas.microsoft.com/office/drawing/2014/main" id="{6A92B14E-EF81-4522-2F2E-3D352A40BCE2}"/>
-              </a:ext>
-            </a:extLst>
-          </p:cNvPr>
-          <p:cNvGraphicFramePr>
-            <a:graphicFrameLocks/>
-          </p:cNvGraphicFramePr>
-          <p:nvPr>
-            <p:custDataLst>
-              <p:tags r:id="rId1"/>
-            </p:custDataLst>
-          </p:nvPr>
-        </p:nvGraphicFramePr>
-        <p:xfrm>
-          <a:off x="1588" y="1588"/>
-          <a:ext cx="1227" cy="1588"/>
-        </p:xfrm>
-        <a:graphic>
-          <a:graphicData uri="http://schemas.openxmlformats.org/presentationml/2006/ole">
-            <mc:AlternateContent xmlns:mc="http://schemas.openxmlformats.org/markup-compatibility/2006">
-              <mc:Choice xmlns:v="urn:schemas-microsoft-com:vml" Requires="v">
-                <p:oleObj name="Слайд think-cell" r:id="rId4" imgW="7772400" imgH="10058400" progId="TCLayout.ActiveDocument.1">
-                  <p:embed/>
-                </p:oleObj>
-              </mc:Choice>
-              <mc:Fallback>
-                <p:oleObj name="Слайд think-cell" r:id="rId4" imgW="7772400" imgH="10058400" progId="TCLayout.ActiveDocument.1">
-                  <p:embed/>
-                  <p:pic>
-                    <p:nvPicPr>
-                      <p:cNvPr id="4" name="think-cell data - do not delete" hidden="1">
-                        <a:extLst>
-                          <a:ext uri="{FF2B5EF4-FFF2-40B4-BE49-F238E27FC236}">
-                            <a16:creationId xmlns:a16="http://schemas.microsoft.com/office/drawing/2014/main" id="{8BBC57CA-736D-086F-444C-C8F7D410636E}"/>
-                          </a:ext>
-                        </a:extLst>
-                      </p:cNvPr>
-                      <p:cNvPicPr/>
-                      <p:nvPr/>
-                    </p:nvPicPr>
-                    <p:blipFill>
-                      <a:blip r:embed="rId5"/>
-                      <a:stretch>
-                        <a:fillRect/>
-                      </a:stretch>
-                    </p:blipFill>
-                    <p:spPr>
-                      <a:xfrm>
-                        <a:off x="1588" y="1588"/>
-                        <a:ext cx="1227" cy="1588"/>
-                      </a:xfrm>
-                      <a:prstGeom prst="rect">
-                        <a:avLst/>
-                      </a:prstGeom>
-                    </p:spPr>
-                  </p:pic>
-                </p:oleObj>
-              </mc:Fallback>
-            </mc:AlternateContent>
-          </a:graphicData>
-        </a:graphic>
-      </p:graphicFrame>
       <p:sp>
         <p:nvSpPr>
           <p:cNvPr id="2" name="Заголовок 1">
@@ -28675,73 +26262,6 @@
           <a:chExt cx="0" cy="0"/>
         </a:xfrm>
       </p:grpSpPr>
-      <p:graphicFrame>
-        <p:nvGraphicFramePr>
-          <p:cNvPr id="4" name="think-cell data - do not delete" hidden="1">
-            <a:extLst>
-              <a:ext uri="{FF2B5EF4-FFF2-40B4-BE49-F238E27FC236}">
-                <a16:creationId xmlns:a16="http://schemas.microsoft.com/office/drawing/2014/main" id="{20337B0D-3B21-6892-E548-9B7D1505C285}"/>
-              </a:ext>
-            </a:extLst>
-          </p:cNvPr>
-          <p:cNvGraphicFramePr>
-            <a:graphicFrameLocks/>
-          </p:cNvGraphicFramePr>
-          <p:nvPr>
-            <p:custDataLst>
-              <p:tags r:id="rId1"/>
-            </p:custDataLst>
-          </p:nvPr>
-        </p:nvGraphicFramePr>
-        <p:xfrm>
-          <a:off x="1588" y="1588"/>
-          <a:ext cx="1227" cy="1588"/>
-        </p:xfrm>
-        <a:graphic>
-          <a:graphicData uri="http://schemas.openxmlformats.org/presentationml/2006/ole">
-            <mc:AlternateContent xmlns:mc="http://schemas.openxmlformats.org/markup-compatibility/2006">
-              <mc:Choice xmlns:v="urn:schemas-microsoft-com:vml" Requires="v">
-                <p:oleObj name="Слайд think-cell" r:id="rId4" imgW="7772400" imgH="10058400" progId="TCLayout.ActiveDocument.1">
-                  <p:embed/>
-                </p:oleObj>
-              </mc:Choice>
-              <mc:Fallback>
-                <p:oleObj name="Слайд think-cell" r:id="rId4" imgW="7772400" imgH="10058400" progId="TCLayout.ActiveDocument.1">
-                  <p:embed/>
-                  <p:pic>
-                    <p:nvPicPr>
-                      <p:cNvPr id="4" name="think-cell data - do not delete" hidden="1">
-                        <a:extLst>
-                          <a:ext uri="{FF2B5EF4-FFF2-40B4-BE49-F238E27FC236}">
-                            <a16:creationId xmlns:a16="http://schemas.microsoft.com/office/drawing/2014/main" id="{DF76BB2C-0268-972C-9DE5-4DE5D1E2032F}"/>
-                          </a:ext>
-                        </a:extLst>
-                      </p:cNvPr>
-                      <p:cNvPicPr/>
-                      <p:nvPr/>
-                    </p:nvPicPr>
-                    <p:blipFill>
-                      <a:blip r:embed="rId5"/>
-                      <a:stretch>
-                        <a:fillRect/>
-                      </a:stretch>
-                    </p:blipFill>
-                    <p:spPr>
-                      <a:xfrm>
-                        <a:off x="1588" y="1588"/>
-                        <a:ext cx="1227" cy="1588"/>
-                      </a:xfrm>
-                      <a:prstGeom prst="rect">
-                        <a:avLst/>
-                      </a:prstGeom>
-                    </p:spPr>
-                  </p:pic>
-                </p:oleObj>
-              </mc:Fallback>
-            </mc:AlternateContent>
-          </a:graphicData>
-        </a:graphic>
-      </p:graphicFrame>
       <p:sp>
         <p:nvSpPr>
           <p:cNvPr id="2" name="Заголовок 1">
@@ -30359,73 +27879,6 @@
           <a:chExt cx="0" cy="0"/>
         </a:xfrm>
       </p:grpSpPr>
-      <p:graphicFrame>
-        <p:nvGraphicFramePr>
-          <p:cNvPr id="4" name="think-cell data - do not delete" hidden="1">
-            <a:extLst>
-              <a:ext uri="{FF2B5EF4-FFF2-40B4-BE49-F238E27FC236}">
-                <a16:creationId xmlns:a16="http://schemas.microsoft.com/office/drawing/2014/main" id="{4773550C-5F2B-E210-D094-CB3456F56A77}"/>
-              </a:ext>
-            </a:extLst>
-          </p:cNvPr>
-          <p:cNvGraphicFramePr>
-            <a:graphicFrameLocks/>
-          </p:cNvGraphicFramePr>
-          <p:nvPr>
-            <p:custDataLst>
-              <p:tags r:id="rId1"/>
-            </p:custDataLst>
-          </p:nvPr>
-        </p:nvGraphicFramePr>
-        <p:xfrm>
-          <a:off x="1588" y="1588"/>
-          <a:ext cx="1227" cy="1588"/>
-        </p:xfrm>
-        <a:graphic>
-          <a:graphicData uri="http://schemas.openxmlformats.org/presentationml/2006/ole">
-            <mc:AlternateContent xmlns:mc="http://schemas.openxmlformats.org/markup-compatibility/2006">
-              <mc:Choice xmlns:v="urn:schemas-microsoft-com:vml" Requires="v">
-                <p:oleObj name="Слайд think-cell" r:id="rId4" imgW="7772400" imgH="10058400" progId="TCLayout.ActiveDocument.1">
-                  <p:embed/>
-                </p:oleObj>
-              </mc:Choice>
-              <mc:Fallback>
-                <p:oleObj name="Слайд think-cell" r:id="rId4" imgW="7772400" imgH="10058400" progId="TCLayout.ActiveDocument.1">
-                  <p:embed/>
-                  <p:pic>
-                    <p:nvPicPr>
-                      <p:cNvPr id="4" name="think-cell data - do not delete" hidden="1">
-                        <a:extLst>
-                          <a:ext uri="{FF2B5EF4-FFF2-40B4-BE49-F238E27FC236}">
-                            <a16:creationId xmlns:a16="http://schemas.microsoft.com/office/drawing/2014/main" id="{20337B0D-3B21-6892-E548-9B7D1505C285}"/>
-                          </a:ext>
-                        </a:extLst>
-                      </p:cNvPr>
-                      <p:cNvPicPr/>
-                      <p:nvPr/>
-                    </p:nvPicPr>
-                    <p:blipFill>
-                      <a:blip r:embed="rId5"/>
-                      <a:stretch>
-                        <a:fillRect/>
-                      </a:stretch>
-                    </p:blipFill>
-                    <p:spPr>
-                      <a:xfrm>
-                        <a:off x="1588" y="1588"/>
-                        <a:ext cx="1227" cy="1588"/>
-                      </a:xfrm>
-                      <a:prstGeom prst="rect">
-                        <a:avLst/>
-                      </a:prstGeom>
-                    </p:spPr>
-                  </p:pic>
-                </p:oleObj>
-              </mc:Fallback>
-            </mc:AlternateContent>
-          </a:graphicData>
-        </a:graphic>
-      </p:graphicFrame>
       <p:sp>
         <p:nvSpPr>
           <p:cNvPr id="2" name="Заголовок 1">
@@ -31676,73 +29129,6 @@
           <a:chExt cx="0" cy="0"/>
         </a:xfrm>
       </p:grpSpPr>
-      <p:graphicFrame>
-        <p:nvGraphicFramePr>
-          <p:cNvPr id="4" name="think-cell data - do not delete" hidden="1">
-            <a:extLst>
-              <a:ext uri="{FF2B5EF4-FFF2-40B4-BE49-F238E27FC236}">
-                <a16:creationId xmlns:a16="http://schemas.microsoft.com/office/drawing/2014/main" id="{194DD0F6-34E9-C2E8-12AB-C13E0D692907}"/>
-              </a:ext>
-            </a:extLst>
-          </p:cNvPr>
-          <p:cNvGraphicFramePr>
-            <a:graphicFrameLocks/>
-          </p:cNvGraphicFramePr>
-          <p:nvPr>
-            <p:custDataLst>
-              <p:tags r:id="rId1"/>
-            </p:custDataLst>
-          </p:nvPr>
-        </p:nvGraphicFramePr>
-        <p:xfrm>
-          <a:off x="1588" y="1588"/>
-          <a:ext cx="1227" cy="1588"/>
-        </p:xfrm>
-        <a:graphic>
-          <a:graphicData uri="http://schemas.openxmlformats.org/presentationml/2006/ole">
-            <mc:AlternateContent xmlns:mc="http://schemas.openxmlformats.org/markup-compatibility/2006">
-              <mc:Choice xmlns:v="urn:schemas-microsoft-com:vml" Requires="v">
-                <p:oleObj name="Слайд think-cell" r:id="rId4" imgW="7772400" imgH="10058400" progId="TCLayout.ActiveDocument.1">
-                  <p:embed/>
-                </p:oleObj>
-              </mc:Choice>
-              <mc:Fallback>
-                <p:oleObj name="Слайд think-cell" r:id="rId4" imgW="7772400" imgH="10058400" progId="TCLayout.ActiveDocument.1">
-                  <p:embed/>
-                  <p:pic>
-                    <p:nvPicPr>
-                      <p:cNvPr id="4" name="think-cell data - do not delete" hidden="1">
-                        <a:extLst>
-                          <a:ext uri="{FF2B5EF4-FFF2-40B4-BE49-F238E27FC236}">
-                            <a16:creationId xmlns:a16="http://schemas.microsoft.com/office/drawing/2014/main" id="{4773550C-5F2B-E210-D094-CB3456F56A77}"/>
-                          </a:ext>
-                        </a:extLst>
-                      </p:cNvPr>
-                      <p:cNvPicPr/>
-                      <p:nvPr/>
-                    </p:nvPicPr>
-                    <p:blipFill>
-                      <a:blip r:embed="rId5"/>
-                      <a:stretch>
-                        <a:fillRect/>
-                      </a:stretch>
-                    </p:blipFill>
-                    <p:spPr>
-                      <a:xfrm>
-                        <a:off x="1588" y="1588"/>
-                        <a:ext cx="1227" cy="1588"/>
-                      </a:xfrm>
-                      <a:prstGeom prst="rect">
-                        <a:avLst/>
-                      </a:prstGeom>
-                    </p:spPr>
-                  </p:pic>
-                </p:oleObj>
-              </mc:Fallback>
-            </mc:AlternateContent>
-          </a:graphicData>
-        </a:graphic>
-      </p:graphicFrame>
       <p:sp>
         <p:nvSpPr>
           <p:cNvPr id="2" name="Заголовок 1">
@@ -33237,73 +30623,6 @@
           <a:chExt cx="0" cy="0"/>
         </a:xfrm>
       </p:grpSpPr>
-      <p:graphicFrame>
-        <p:nvGraphicFramePr>
-          <p:cNvPr id="4" name="think-cell data - do not delete" hidden="1">
-            <a:extLst>
-              <a:ext uri="{FF2B5EF4-FFF2-40B4-BE49-F238E27FC236}">
-                <a16:creationId xmlns:a16="http://schemas.microsoft.com/office/drawing/2014/main" id="{020BE547-4DFF-3C6C-EABB-597EC2501041}"/>
-              </a:ext>
-            </a:extLst>
-          </p:cNvPr>
-          <p:cNvGraphicFramePr>
-            <a:graphicFrameLocks/>
-          </p:cNvGraphicFramePr>
-          <p:nvPr>
-            <p:custDataLst>
-              <p:tags r:id="rId1"/>
-            </p:custDataLst>
-          </p:nvPr>
-        </p:nvGraphicFramePr>
-        <p:xfrm>
-          <a:off x="1588" y="1588"/>
-          <a:ext cx="1227" cy="1588"/>
-        </p:xfrm>
-        <a:graphic>
-          <a:graphicData uri="http://schemas.openxmlformats.org/presentationml/2006/ole">
-            <mc:AlternateContent xmlns:mc="http://schemas.openxmlformats.org/markup-compatibility/2006">
-              <mc:Choice xmlns:v="urn:schemas-microsoft-com:vml" Requires="v">
-                <p:oleObj name="Слайд think-cell" r:id="rId4" imgW="7772400" imgH="10058400" progId="TCLayout.ActiveDocument.1">
-                  <p:embed/>
-                </p:oleObj>
-              </mc:Choice>
-              <mc:Fallback>
-                <p:oleObj name="Слайд think-cell" r:id="rId4" imgW="7772400" imgH="10058400" progId="TCLayout.ActiveDocument.1">
-                  <p:embed/>
-                  <p:pic>
-                    <p:nvPicPr>
-                      <p:cNvPr id="4" name="think-cell data - do not delete" hidden="1">
-                        <a:extLst>
-                          <a:ext uri="{FF2B5EF4-FFF2-40B4-BE49-F238E27FC236}">
-                            <a16:creationId xmlns:a16="http://schemas.microsoft.com/office/drawing/2014/main" id="{4836B9DB-118F-7FEB-4F4E-8A2F13FA5DB1}"/>
-                          </a:ext>
-                        </a:extLst>
-                      </p:cNvPr>
-                      <p:cNvPicPr/>
-                      <p:nvPr/>
-                    </p:nvPicPr>
-                    <p:blipFill>
-                      <a:blip r:embed="rId5"/>
-                      <a:stretch>
-                        <a:fillRect/>
-                      </a:stretch>
-                    </p:blipFill>
-                    <p:spPr>
-                      <a:xfrm>
-                        <a:off x="1588" y="1588"/>
-                        <a:ext cx="1227" cy="1588"/>
-                      </a:xfrm>
-                      <a:prstGeom prst="rect">
-                        <a:avLst/>
-                      </a:prstGeom>
-                    </p:spPr>
-                  </p:pic>
-                </p:oleObj>
-              </mc:Fallback>
-            </mc:AlternateContent>
-          </a:graphicData>
-        </a:graphic>
-      </p:graphicFrame>
       <p:sp>
         <p:nvSpPr>
           <p:cNvPr id="2" name="Заголовок 1">
@@ -34520,73 +31839,6 @@
           <a:chExt cx="0" cy="0"/>
         </a:xfrm>
       </p:grpSpPr>
-      <p:graphicFrame>
-        <p:nvGraphicFramePr>
-          <p:cNvPr id="4" name="think-cell data - do not delete" hidden="1">
-            <a:extLst>
-              <a:ext uri="{FF2B5EF4-FFF2-40B4-BE49-F238E27FC236}">
-                <a16:creationId xmlns:a16="http://schemas.microsoft.com/office/drawing/2014/main" id="{85E40FF5-02DB-5F8E-06EA-DC5536D256E4}"/>
-              </a:ext>
-            </a:extLst>
-          </p:cNvPr>
-          <p:cNvGraphicFramePr>
-            <a:graphicFrameLocks/>
-          </p:cNvGraphicFramePr>
-          <p:nvPr>
-            <p:custDataLst>
-              <p:tags r:id="rId1"/>
-            </p:custDataLst>
-          </p:nvPr>
-        </p:nvGraphicFramePr>
-        <p:xfrm>
-          <a:off x="1588" y="1588"/>
-          <a:ext cx="1227" cy="1588"/>
-        </p:xfrm>
-        <a:graphic>
-          <a:graphicData uri="http://schemas.openxmlformats.org/presentationml/2006/ole">
-            <mc:AlternateContent xmlns:mc="http://schemas.openxmlformats.org/markup-compatibility/2006">
-              <mc:Choice xmlns:v="urn:schemas-microsoft-com:vml" Requires="v">
-                <p:oleObj name="Слайд think-cell" r:id="rId3" imgW="7772400" imgH="10058400" progId="TCLayout.ActiveDocument.1">
-                  <p:embed/>
-                </p:oleObj>
-              </mc:Choice>
-              <mc:Fallback>
-                <p:oleObj name="Слайд think-cell" r:id="rId3" imgW="7772400" imgH="10058400" progId="TCLayout.ActiveDocument.1">
-                  <p:embed/>
-                  <p:pic>
-                    <p:nvPicPr>
-                      <p:cNvPr id="4" name="think-cell data - do not delete" hidden="1">
-                        <a:extLst>
-                          <a:ext uri="{FF2B5EF4-FFF2-40B4-BE49-F238E27FC236}">
-                            <a16:creationId xmlns:a16="http://schemas.microsoft.com/office/drawing/2014/main" id="{020BE547-4DFF-3C6C-EABB-597EC2501041}"/>
-                          </a:ext>
-                        </a:extLst>
-                      </p:cNvPr>
-                      <p:cNvPicPr/>
-                      <p:nvPr/>
-                    </p:nvPicPr>
-                    <p:blipFill>
-                      <a:blip r:embed="rId4"/>
-                      <a:stretch>
-                        <a:fillRect/>
-                      </a:stretch>
-                    </p:blipFill>
-                    <p:spPr>
-                      <a:xfrm>
-                        <a:off x="1588" y="1588"/>
-                        <a:ext cx="1227" cy="1588"/>
-                      </a:xfrm>
-                      <a:prstGeom prst="rect">
-                        <a:avLst/>
-                      </a:prstGeom>
-                    </p:spPr>
-                  </p:pic>
-                </p:oleObj>
-              </mc:Fallback>
-            </mc:AlternateContent>
-          </a:graphicData>
-        </a:graphic>
-      </p:graphicFrame>
       <p:sp>
         <p:nvSpPr>
           <p:cNvPr id="2" name="Заголовок 1">
